--- a/docs/pptx/carbo/ritu-carbo-linsubhr-dosedisc-anemia2.pptx
+++ b/docs/pptx/carbo/ritu-carbo-linsubhr-dosedisc-anemia2.pptx
@@ -2443,7 +2443,7 @@
           </p:nvSpPr>
           <p:spPr>
             <a:xfrm>
-              <a:off x="909675" y="1896563"/>
+              <a:off x="911833" y="1896563"/>
               <a:ext cx="0" cy="3826579"/>
             </a:xfrm>
             <a:custGeom>
@@ -2486,7 +2486,7 @@
           </p:nvSpPr>
           <p:spPr>
             <a:xfrm>
-              <a:off x="3323794" y="1896563"/>
+              <a:off x="3322810" y="1896563"/>
               <a:ext cx="0" cy="3826579"/>
             </a:xfrm>
             <a:custGeom>
@@ -2529,7 +2529,7 @@
           </p:nvSpPr>
           <p:spPr>
             <a:xfrm>
-              <a:off x="5737913" y="1896563"/>
+              <a:off x="5733788" y="1896563"/>
               <a:ext cx="0" cy="3826579"/>
             </a:xfrm>
             <a:custGeom>
@@ -2572,7 +2572,7 @@
           </p:nvSpPr>
           <p:spPr>
             <a:xfrm>
-              <a:off x="8152032" y="1896563"/>
+              <a:off x="8144765" y="1896563"/>
               <a:ext cx="0" cy="3826579"/>
             </a:xfrm>
             <a:custGeom>
@@ -2830,7 +2830,7 @@
           </p:nvSpPr>
           <p:spPr>
             <a:xfrm>
-              <a:off x="2116734" y="1896563"/>
+              <a:off x="2117321" y="1896563"/>
               <a:ext cx="0" cy="3826579"/>
             </a:xfrm>
             <a:custGeom>
@@ -2873,7 +2873,7 @@
           </p:nvSpPr>
           <p:spPr>
             <a:xfrm>
-              <a:off x="4530853" y="1896563"/>
+              <a:off x="4528299" y="1896563"/>
               <a:ext cx="0" cy="3826579"/>
             </a:xfrm>
             <a:custGeom>
@@ -2916,7 +2916,7 @@
           </p:nvSpPr>
           <p:spPr>
             <a:xfrm>
-              <a:off x="6944973" y="1896563"/>
+              <a:off x="6939276" y="1896563"/>
               <a:ext cx="0" cy="3826579"/>
             </a:xfrm>
             <a:custGeom>
@@ -2959,612 +2959,612 @@
           </p:nvSpPr>
           <p:spPr>
             <a:xfrm>
-              <a:off x="1172049" y="2165003"/>
-              <a:ext cx="7090630" cy="3117784"/>
+              <a:off x="1172049" y="2067557"/>
+              <a:ext cx="7090630" cy="3220226"/>
             </a:xfrm>
             <a:custGeom>
               <a:avLst/>
               <a:pathLst>
-                <a:path w="7090630" h="3117784">
+                <a:path w="7090630" h="3220226">
                   <a:moveTo>
-                    <a:pt x="0" y="2506699"/>
+                    <a:pt x="0" y="2628122"/>
                   </a:moveTo>
                   <a:lnTo>
-                    <a:pt x="71622" y="2506869"/>
-                  </a:lnTo>
-                  <a:lnTo>
-                    <a:pt x="143245" y="2507040"/>
-                  </a:lnTo>
-                  <a:lnTo>
-                    <a:pt x="214867" y="2507210"/>
-                  </a:lnTo>
-                  <a:lnTo>
-                    <a:pt x="286490" y="2507381"/>
-                  </a:lnTo>
-                  <a:lnTo>
-                    <a:pt x="358112" y="2507551"/>
-                  </a:lnTo>
-                  <a:lnTo>
-                    <a:pt x="429735" y="2507722"/>
-                  </a:lnTo>
-                  <a:lnTo>
-                    <a:pt x="501357" y="2507892"/>
-                  </a:lnTo>
-                  <a:lnTo>
-                    <a:pt x="572980" y="2508063"/>
-                  </a:lnTo>
-                  <a:lnTo>
-                    <a:pt x="644602" y="2508233"/>
-                  </a:lnTo>
-                  <a:lnTo>
-                    <a:pt x="716225" y="2508403"/>
-                  </a:lnTo>
-                  <a:lnTo>
-                    <a:pt x="787847" y="2508574"/>
-                  </a:lnTo>
-                  <a:lnTo>
-                    <a:pt x="859470" y="2508744"/>
-                  </a:lnTo>
-                  <a:lnTo>
-                    <a:pt x="931092" y="2508914"/>
-                  </a:lnTo>
-                  <a:lnTo>
-                    <a:pt x="1002715" y="2509084"/>
-                  </a:lnTo>
-                  <a:lnTo>
-                    <a:pt x="1074337" y="2509255"/>
-                  </a:lnTo>
-                  <a:lnTo>
-                    <a:pt x="1145960" y="2509425"/>
-                  </a:lnTo>
-                  <a:lnTo>
-                    <a:pt x="1217582" y="2509595"/>
-                  </a:lnTo>
-                  <a:lnTo>
-                    <a:pt x="1289205" y="2509765"/>
-                  </a:lnTo>
-                  <a:lnTo>
-                    <a:pt x="1360827" y="2509935"/>
-                  </a:lnTo>
-                  <a:lnTo>
-                    <a:pt x="1432450" y="2510105"/>
-                  </a:lnTo>
-                  <a:lnTo>
-                    <a:pt x="1504073" y="2510275"/>
-                  </a:lnTo>
-                  <a:lnTo>
-                    <a:pt x="1575695" y="2510445"/>
-                  </a:lnTo>
-                  <a:lnTo>
-                    <a:pt x="1647318" y="2510615"/>
-                  </a:lnTo>
-                  <a:lnTo>
-                    <a:pt x="1718940" y="2510785"/>
-                  </a:lnTo>
-                  <a:lnTo>
-                    <a:pt x="1790563" y="2510954"/>
-                  </a:lnTo>
-                  <a:lnTo>
-                    <a:pt x="1862185" y="2511124"/>
-                  </a:lnTo>
-                  <a:lnTo>
-                    <a:pt x="1933808" y="2511294"/>
-                  </a:lnTo>
-                  <a:lnTo>
-                    <a:pt x="2005430" y="2511464"/>
-                  </a:lnTo>
-                  <a:lnTo>
-                    <a:pt x="2077053" y="2511633"/>
-                  </a:lnTo>
-                  <a:lnTo>
-                    <a:pt x="2148675" y="2511803"/>
-                  </a:lnTo>
-                  <a:lnTo>
-                    <a:pt x="2220298" y="2511973"/>
-                  </a:lnTo>
-                  <a:lnTo>
-                    <a:pt x="2291920" y="2512142"/>
-                  </a:lnTo>
-                  <a:lnTo>
-                    <a:pt x="2363543" y="2512312"/>
-                  </a:lnTo>
-                  <a:lnTo>
-                    <a:pt x="2435165" y="2512481"/>
-                  </a:lnTo>
-                  <a:lnTo>
-                    <a:pt x="2506788" y="2512651"/>
-                  </a:lnTo>
-                  <a:lnTo>
-                    <a:pt x="2578410" y="2512820"/>
-                  </a:lnTo>
-                  <a:lnTo>
-                    <a:pt x="2650033" y="2512990"/>
-                  </a:lnTo>
-                  <a:lnTo>
-                    <a:pt x="2721655" y="2513159"/>
-                  </a:lnTo>
-                  <a:lnTo>
-                    <a:pt x="2793278" y="2513329"/>
-                  </a:lnTo>
-                  <a:lnTo>
-                    <a:pt x="2864901" y="2513498"/>
-                  </a:lnTo>
-                  <a:lnTo>
-                    <a:pt x="2936523" y="2513667"/>
-                  </a:lnTo>
-                  <a:lnTo>
-                    <a:pt x="3008146" y="2513837"/>
-                  </a:lnTo>
-                  <a:lnTo>
-                    <a:pt x="3079768" y="2514006"/>
-                  </a:lnTo>
-                  <a:lnTo>
-                    <a:pt x="3151391" y="2514175"/>
-                  </a:lnTo>
-                  <a:lnTo>
-                    <a:pt x="3223013" y="2514344"/>
-                  </a:lnTo>
-                  <a:lnTo>
-                    <a:pt x="3294636" y="2514513"/>
-                  </a:lnTo>
-                  <a:lnTo>
-                    <a:pt x="3366258" y="2493701"/>
-                  </a:lnTo>
-                  <a:lnTo>
-                    <a:pt x="3437881" y="2470541"/>
-                  </a:lnTo>
-                  <a:lnTo>
-                    <a:pt x="3509503" y="2446779"/>
-                  </a:lnTo>
-                  <a:lnTo>
-                    <a:pt x="3581126" y="2422400"/>
-                  </a:lnTo>
-                  <a:lnTo>
-                    <a:pt x="3652748" y="2397386"/>
-                  </a:lnTo>
-                  <a:lnTo>
-                    <a:pt x="3724371" y="2371721"/>
-                  </a:lnTo>
-                  <a:lnTo>
-                    <a:pt x="3795993" y="2345390"/>
-                  </a:lnTo>
-                  <a:lnTo>
-                    <a:pt x="3867616" y="2318373"/>
-                  </a:lnTo>
-                  <a:lnTo>
-                    <a:pt x="3939238" y="2290654"/>
-                  </a:lnTo>
-                  <a:lnTo>
-                    <a:pt x="4010861" y="2262213"/>
-                  </a:lnTo>
-                  <a:lnTo>
-                    <a:pt x="4082483" y="2233034"/>
-                  </a:lnTo>
-                  <a:lnTo>
-                    <a:pt x="4154106" y="2203095"/>
-                  </a:lnTo>
-                  <a:lnTo>
-                    <a:pt x="4225729" y="2172378"/>
-                  </a:lnTo>
-                  <a:lnTo>
-                    <a:pt x="4297351" y="2140861"/>
-                  </a:lnTo>
-                  <a:lnTo>
-                    <a:pt x="4368974" y="2108526"/>
-                  </a:lnTo>
-                  <a:lnTo>
-                    <a:pt x="4440596" y="2075349"/>
-                  </a:lnTo>
-                  <a:lnTo>
-                    <a:pt x="4512219" y="2041309"/>
-                  </a:lnTo>
-                  <a:lnTo>
-                    <a:pt x="4583841" y="2006384"/>
-                  </a:lnTo>
-                  <a:lnTo>
-                    <a:pt x="4655464" y="1970551"/>
-                  </a:lnTo>
-                  <a:lnTo>
-                    <a:pt x="4727086" y="1933786"/>
-                  </a:lnTo>
-                  <a:lnTo>
-                    <a:pt x="4798709" y="1896065"/>
-                  </a:lnTo>
-                  <a:lnTo>
-                    <a:pt x="4870331" y="1857362"/>
-                  </a:lnTo>
-                  <a:lnTo>
-                    <a:pt x="4941954" y="1817653"/>
-                  </a:lnTo>
-                  <a:lnTo>
-                    <a:pt x="5013576" y="1776912"/>
-                  </a:lnTo>
-                  <a:lnTo>
-                    <a:pt x="5085199" y="1735111"/>
-                  </a:lnTo>
-                  <a:lnTo>
-                    <a:pt x="5156821" y="1692222"/>
-                  </a:lnTo>
-                  <a:lnTo>
-                    <a:pt x="5228444" y="1648219"/>
-                  </a:lnTo>
-                  <a:lnTo>
-                    <a:pt x="5300066" y="1603071"/>
-                  </a:lnTo>
-                  <a:lnTo>
-                    <a:pt x="5371689" y="1556748"/>
-                  </a:lnTo>
-                  <a:lnTo>
-                    <a:pt x="5443311" y="1509221"/>
-                  </a:lnTo>
-                  <a:lnTo>
-                    <a:pt x="5514934" y="1460458"/>
-                  </a:lnTo>
-                  <a:lnTo>
-                    <a:pt x="5586557" y="1410427"/>
-                  </a:lnTo>
-                  <a:lnTo>
-                    <a:pt x="5658179" y="1359095"/>
-                  </a:lnTo>
-                  <a:lnTo>
-                    <a:pt x="5729802" y="1306427"/>
-                  </a:lnTo>
-                  <a:lnTo>
-                    <a:pt x="5801424" y="1252390"/>
-                  </a:lnTo>
-                  <a:lnTo>
-                    <a:pt x="5873047" y="1196948"/>
-                  </a:lnTo>
-                  <a:lnTo>
-                    <a:pt x="5944669" y="1140063"/>
-                  </a:lnTo>
-                  <a:lnTo>
-                    <a:pt x="6016292" y="1081699"/>
-                  </a:lnTo>
-                  <a:lnTo>
-                    <a:pt x="6087914" y="1021818"/>
-                  </a:lnTo>
-                  <a:lnTo>
-                    <a:pt x="6159537" y="960379"/>
-                  </a:lnTo>
-                  <a:lnTo>
-                    <a:pt x="6231159" y="897342"/>
-                  </a:lnTo>
-                  <a:lnTo>
-                    <a:pt x="6302782" y="832665"/>
-                  </a:lnTo>
-                  <a:lnTo>
-                    <a:pt x="6374404" y="766307"/>
-                  </a:lnTo>
-                  <a:lnTo>
-                    <a:pt x="6446027" y="698223"/>
-                  </a:lnTo>
-                  <a:lnTo>
-                    <a:pt x="6517649" y="628368"/>
-                  </a:lnTo>
-                  <a:lnTo>
-                    <a:pt x="6589272" y="556697"/>
-                  </a:lnTo>
-                  <a:lnTo>
-                    <a:pt x="6660894" y="483161"/>
-                  </a:lnTo>
-                  <a:lnTo>
-                    <a:pt x="6732517" y="407713"/>
-                  </a:lnTo>
-                  <a:lnTo>
-                    <a:pt x="6804139" y="330303"/>
-                  </a:lnTo>
-                  <a:lnTo>
-                    <a:pt x="6875762" y="250879"/>
-                  </a:lnTo>
-                  <a:lnTo>
-                    <a:pt x="6947385" y="169390"/>
-                  </a:lnTo>
-                  <a:lnTo>
-                    <a:pt x="7019007" y="85782"/>
+                    <a:pt x="71622" y="2627774"/>
+                  </a:lnTo>
+                  <a:lnTo>
+                    <a:pt x="143245" y="2627425"/>
+                  </a:lnTo>
+                  <a:lnTo>
+                    <a:pt x="214867" y="2627077"/>
+                  </a:lnTo>
+                  <a:lnTo>
+                    <a:pt x="286490" y="2626728"/>
+                  </a:lnTo>
+                  <a:lnTo>
+                    <a:pt x="358112" y="2626380"/>
+                  </a:lnTo>
+                  <a:lnTo>
+                    <a:pt x="429735" y="2626031"/>
+                  </a:lnTo>
+                  <a:lnTo>
+                    <a:pt x="501357" y="2625682"/>
+                  </a:lnTo>
+                  <a:lnTo>
+                    <a:pt x="572980" y="2625333"/>
+                  </a:lnTo>
+                  <a:lnTo>
+                    <a:pt x="644602" y="2624983"/>
+                  </a:lnTo>
+                  <a:lnTo>
+                    <a:pt x="716225" y="2624634"/>
+                  </a:lnTo>
+                  <a:lnTo>
+                    <a:pt x="787847" y="2624284"/>
+                  </a:lnTo>
+                  <a:lnTo>
+                    <a:pt x="859470" y="2623934"/>
+                  </a:lnTo>
+                  <a:lnTo>
+                    <a:pt x="931092" y="2623585"/>
+                  </a:lnTo>
+                  <a:lnTo>
+                    <a:pt x="1002715" y="2623235"/>
+                  </a:lnTo>
+                  <a:lnTo>
+                    <a:pt x="1074337" y="2622884"/>
+                  </a:lnTo>
+                  <a:lnTo>
+                    <a:pt x="1145960" y="2622534"/>
+                  </a:lnTo>
+                  <a:lnTo>
+                    <a:pt x="1217582" y="2622184"/>
+                  </a:lnTo>
+                  <a:lnTo>
+                    <a:pt x="1289205" y="2621833"/>
+                  </a:lnTo>
+                  <a:lnTo>
+                    <a:pt x="1360827" y="2621482"/>
+                  </a:lnTo>
+                  <a:lnTo>
+                    <a:pt x="1432450" y="2621131"/>
+                  </a:lnTo>
+                  <a:lnTo>
+                    <a:pt x="1504073" y="2620780"/>
+                  </a:lnTo>
+                  <a:lnTo>
+                    <a:pt x="1575695" y="2620429"/>
+                  </a:lnTo>
+                  <a:lnTo>
+                    <a:pt x="1647318" y="2620078"/>
+                  </a:lnTo>
+                  <a:lnTo>
+                    <a:pt x="1718940" y="2619726"/>
+                  </a:lnTo>
+                  <a:lnTo>
+                    <a:pt x="1790563" y="2619375"/>
+                  </a:lnTo>
+                  <a:lnTo>
+                    <a:pt x="1862185" y="2619023"/>
+                  </a:lnTo>
+                  <a:lnTo>
+                    <a:pt x="1933808" y="2618671"/>
+                  </a:lnTo>
+                  <a:lnTo>
+                    <a:pt x="2005430" y="2618319"/>
+                  </a:lnTo>
+                  <a:lnTo>
+                    <a:pt x="2077053" y="2617967"/>
+                  </a:lnTo>
+                  <a:lnTo>
+                    <a:pt x="2148675" y="2617615"/>
+                  </a:lnTo>
+                  <a:lnTo>
+                    <a:pt x="2220298" y="2617262"/>
+                  </a:lnTo>
+                  <a:lnTo>
+                    <a:pt x="2291920" y="2616910"/>
+                  </a:lnTo>
+                  <a:lnTo>
+                    <a:pt x="2363543" y="2616557"/>
+                  </a:lnTo>
+                  <a:lnTo>
+                    <a:pt x="2435165" y="2616204"/>
+                  </a:lnTo>
+                  <a:lnTo>
+                    <a:pt x="2506788" y="2615851"/>
+                  </a:lnTo>
+                  <a:lnTo>
+                    <a:pt x="2578410" y="2615498"/>
+                  </a:lnTo>
+                  <a:lnTo>
+                    <a:pt x="2650033" y="2615144"/>
+                  </a:lnTo>
+                  <a:lnTo>
+                    <a:pt x="2721655" y="2614791"/>
+                  </a:lnTo>
+                  <a:lnTo>
+                    <a:pt x="2793278" y="2614437"/>
+                  </a:lnTo>
+                  <a:lnTo>
+                    <a:pt x="2864901" y="2614084"/>
+                  </a:lnTo>
+                  <a:lnTo>
+                    <a:pt x="2936523" y="2613730"/>
+                  </a:lnTo>
+                  <a:lnTo>
+                    <a:pt x="3008146" y="2613376"/>
+                  </a:lnTo>
+                  <a:lnTo>
+                    <a:pt x="3079768" y="2613021"/>
+                  </a:lnTo>
+                  <a:lnTo>
+                    <a:pt x="3151391" y="2612667"/>
+                  </a:lnTo>
+                  <a:lnTo>
+                    <a:pt x="3223013" y="2612313"/>
+                  </a:lnTo>
+                  <a:lnTo>
+                    <a:pt x="3294636" y="2611063"/>
+                  </a:lnTo>
+                  <a:lnTo>
+                    <a:pt x="3366258" y="2587994"/>
+                  </a:lnTo>
+                  <a:lnTo>
+                    <a:pt x="3437881" y="2564315"/>
+                  </a:lnTo>
+                  <a:lnTo>
+                    <a:pt x="3509503" y="2540007"/>
+                  </a:lnTo>
+                  <a:lnTo>
+                    <a:pt x="3581126" y="2515056"/>
+                  </a:lnTo>
+                  <a:lnTo>
+                    <a:pt x="3652748" y="2489444"/>
+                  </a:lnTo>
+                  <a:lnTo>
+                    <a:pt x="3724371" y="2463152"/>
+                  </a:lnTo>
+                  <a:lnTo>
+                    <a:pt x="3795993" y="2436164"/>
+                  </a:lnTo>
+                  <a:lnTo>
+                    <a:pt x="3867616" y="2408462"/>
+                  </a:lnTo>
+                  <a:lnTo>
+                    <a:pt x="3939238" y="2380025"/>
+                  </a:lnTo>
+                  <a:lnTo>
+                    <a:pt x="4010861" y="2350834"/>
+                  </a:lnTo>
+                  <a:lnTo>
+                    <a:pt x="4082483" y="2320870"/>
+                  </a:lnTo>
+                  <a:lnTo>
+                    <a:pt x="4154106" y="2290112"/>
+                  </a:lnTo>
+                  <a:lnTo>
+                    <a:pt x="4225729" y="2258539"/>
+                  </a:lnTo>
+                  <a:lnTo>
+                    <a:pt x="4297351" y="2226129"/>
+                  </a:lnTo>
+                  <a:lnTo>
+                    <a:pt x="4368974" y="2192861"/>
+                  </a:lnTo>
+                  <a:lnTo>
+                    <a:pt x="4440596" y="2158711"/>
+                  </a:lnTo>
+                  <a:lnTo>
+                    <a:pt x="4512219" y="2123656"/>
+                  </a:lnTo>
+                  <a:lnTo>
+                    <a:pt x="4583841" y="2087672"/>
+                  </a:lnTo>
+                  <a:lnTo>
+                    <a:pt x="4655464" y="2050735"/>
+                  </a:lnTo>
+                  <a:lnTo>
+                    <a:pt x="4727086" y="2012819"/>
+                  </a:lnTo>
+                  <a:lnTo>
+                    <a:pt x="4798709" y="1973899"/>
+                  </a:lnTo>
+                  <a:lnTo>
+                    <a:pt x="4870331" y="1933947"/>
+                  </a:lnTo>
+                  <a:lnTo>
+                    <a:pt x="4941954" y="1892936"/>
+                  </a:lnTo>
+                  <a:lnTo>
+                    <a:pt x="5013576" y="1850839"/>
+                  </a:lnTo>
+                  <a:lnTo>
+                    <a:pt x="5085199" y="1807626"/>
+                  </a:lnTo>
+                  <a:lnTo>
+                    <a:pt x="5156821" y="1763268"/>
+                  </a:lnTo>
+                  <a:lnTo>
+                    <a:pt x="5228444" y="1717735"/>
+                  </a:lnTo>
+                  <a:lnTo>
+                    <a:pt x="5300066" y="1670995"/>
+                  </a:lnTo>
+                  <a:lnTo>
+                    <a:pt x="5371689" y="1623017"/>
+                  </a:lnTo>
+                  <a:lnTo>
+                    <a:pt x="5443311" y="1573768"/>
+                  </a:lnTo>
+                  <a:lnTo>
+                    <a:pt x="5514934" y="1523213"/>
+                  </a:lnTo>
+                  <a:lnTo>
+                    <a:pt x="5586557" y="1471319"/>
+                  </a:lnTo>
+                  <a:lnTo>
+                    <a:pt x="5658179" y="1418050"/>
+                  </a:lnTo>
+                  <a:lnTo>
+                    <a:pt x="5729802" y="1363369"/>
+                  </a:lnTo>
+                  <a:lnTo>
+                    <a:pt x="5801424" y="1307240"/>
+                  </a:lnTo>
+                  <a:lnTo>
+                    <a:pt x="5873047" y="1249623"/>
+                  </a:lnTo>
+                  <a:lnTo>
+                    <a:pt x="5944669" y="1190479"/>
+                  </a:lnTo>
+                  <a:lnTo>
+                    <a:pt x="6016292" y="1129769"/>
+                  </a:lnTo>
+                  <a:lnTo>
+                    <a:pt x="6087914" y="1067449"/>
+                  </a:lnTo>
+                  <a:lnTo>
+                    <a:pt x="6159537" y="1003478"/>
+                  </a:lnTo>
+                  <a:lnTo>
+                    <a:pt x="6231159" y="937812"/>
+                  </a:lnTo>
+                  <a:lnTo>
+                    <a:pt x="6302782" y="870407"/>
+                  </a:lnTo>
+                  <a:lnTo>
+                    <a:pt x="6374404" y="801215"/>
+                  </a:lnTo>
+                  <a:lnTo>
+                    <a:pt x="6446027" y="730189"/>
+                  </a:lnTo>
+                  <a:lnTo>
+                    <a:pt x="6517649" y="657282"/>
+                  </a:lnTo>
+                  <a:lnTo>
+                    <a:pt x="6589272" y="582443"/>
+                  </a:lnTo>
+                  <a:lnTo>
+                    <a:pt x="6660894" y="505620"/>
+                  </a:lnTo>
+                  <a:lnTo>
+                    <a:pt x="6732517" y="426762"/>
+                  </a:lnTo>
+                  <a:lnTo>
+                    <a:pt x="6804139" y="345815"/>
+                  </a:lnTo>
+                  <a:lnTo>
+                    <a:pt x="6875762" y="262722"/>
+                  </a:lnTo>
+                  <a:lnTo>
+                    <a:pt x="6947385" y="177428"/>
+                  </a:lnTo>
+                  <a:lnTo>
+                    <a:pt x="7019007" y="89874"/>
                   </a:lnTo>
                   <a:lnTo>
                     <a:pt x="7090630" y="0"/>
                   </a:lnTo>
                   <a:lnTo>
-                    <a:pt x="7090630" y="2523431"/>
-                  </a:lnTo>
-                  <a:lnTo>
-                    <a:pt x="7019007" y="2523264"/>
-                  </a:lnTo>
-                  <a:lnTo>
-                    <a:pt x="6947385" y="2523096"/>
-                  </a:lnTo>
-                  <a:lnTo>
-                    <a:pt x="6875762" y="2522929"/>
-                  </a:lnTo>
-                  <a:lnTo>
-                    <a:pt x="6804139" y="2522761"/>
-                  </a:lnTo>
-                  <a:lnTo>
-                    <a:pt x="6732517" y="2522594"/>
-                  </a:lnTo>
-                  <a:lnTo>
-                    <a:pt x="6660894" y="2522426"/>
-                  </a:lnTo>
-                  <a:lnTo>
-                    <a:pt x="6589272" y="2522258"/>
-                  </a:lnTo>
-                  <a:lnTo>
-                    <a:pt x="6517649" y="2522091"/>
-                  </a:lnTo>
-                  <a:lnTo>
-                    <a:pt x="6446027" y="2521923"/>
-                  </a:lnTo>
-                  <a:lnTo>
-                    <a:pt x="6374404" y="2521755"/>
-                  </a:lnTo>
-                  <a:lnTo>
-                    <a:pt x="6302782" y="2521588"/>
-                  </a:lnTo>
-                  <a:lnTo>
-                    <a:pt x="6231159" y="2521420"/>
-                  </a:lnTo>
-                  <a:lnTo>
-                    <a:pt x="6159537" y="2521252"/>
-                  </a:lnTo>
-                  <a:lnTo>
-                    <a:pt x="6087914" y="2521084"/>
-                  </a:lnTo>
-                  <a:lnTo>
-                    <a:pt x="6016292" y="2520916"/>
-                  </a:lnTo>
-                  <a:lnTo>
-                    <a:pt x="5944669" y="2520749"/>
-                  </a:lnTo>
-                  <a:lnTo>
-                    <a:pt x="5873047" y="2520581"/>
-                  </a:lnTo>
-                  <a:lnTo>
-                    <a:pt x="5801424" y="2520413"/>
-                  </a:lnTo>
-                  <a:lnTo>
-                    <a:pt x="5729802" y="2520245"/>
-                  </a:lnTo>
-                  <a:lnTo>
-                    <a:pt x="5658179" y="2520077"/>
-                  </a:lnTo>
-                  <a:lnTo>
-                    <a:pt x="5586557" y="2519909"/>
-                  </a:lnTo>
-                  <a:lnTo>
-                    <a:pt x="5514934" y="2519740"/>
-                  </a:lnTo>
-                  <a:lnTo>
-                    <a:pt x="5443311" y="2519572"/>
-                  </a:lnTo>
-                  <a:lnTo>
-                    <a:pt x="5371689" y="2519404"/>
-                  </a:lnTo>
-                  <a:lnTo>
-                    <a:pt x="5300066" y="2519236"/>
-                  </a:lnTo>
-                  <a:lnTo>
-                    <a:pt x="5228444" y="2519068"/>
-                  </a:lnTo>
-                  <a:lnTo>
-                    <a:pt x="5156821" y="2518900"/>
-                  </a:lnTo>
-                  <a:lnTo>
-                    <a:pt x="5085199" y="2518731"/>
-                  </a:lnTo>
-                  <a:lnTo>
-                    <a:pt x="5013576" y="2518563"/>
-                  </a:lnTo>
-                  <a:lnTo>
-                    <a:pt x="4941954" y="2518395"/>
-                  </a:lnTo>
-                  <a:lnTo>
-                    <a:pt x="4870331" y="2518226"/>
-                  </a:lnTo>
-                  <a:lnTo>
-                    <a:pt x="4798709" y="2518058"/>
-                  </a:lnTo>
-                  <a:lnTo>
-                    <a:pt x="4727086" y="2517889"/>
-                  </a:lnTo>
-                  <a:lnTo>
-                    <a:pt x="4655464" y="2517721"/>
-                  </a:lnTo>
-                  <a:lnTo>
-                    <a:pt x="4583841" y="2517552"/>
-                  </a:lnTo>
-                  <a:lnTo>
-                    <a:pt x="4512219" y="2517384"/>
-                  </a:lnTo>
-                  <a:lnTo>
-                    <a:pt x="4440596" y="2517215"/>
-                  </a:lnTo>
-                  <a:lnTo>
-                    <a:pt x="4368974" y="2517047"/>
-                  </a:lnTo>
-                  <a:lnTo>
-                    <a:pt x="4297351" y="2516878"/>
-                  </a:lnTo>
-                  <a:lnTo>
-                    <a:pt x="4225729" y="2516709"/>
-                  </a:lnTo>
-                  <a:lnTo>
-                    <a:pt x="4154106" y="2516540"/>
-                  </a:lnTo>
-                  <a:lnTo>
-                    <a:pt x="4082483" y="2516372"/>
-                  </a:lnTo>
-                  <a:lnTo>
-                    <a:pt x="4010861" y="2516203"/>
-                  </a:lnTo>
-                  <a:lnTo>
-                    <a:pt x="3939238" y="2516034"/>
-                  </a:lnTo>
-                  <a:lnTo>
-                    <a:pt x="3867616" y="2515865"/>
-                  </a:lnTo>
-                  <a:lnTo>
-                    <a:pt x="3795993" y="2515696"/>
-                  </a:lnTo>
-                  <a:lnTo>
-                    <a:pt x="3724371" y="2515527"/>
-                  </a:lnTo>
-                  <a:lnTo>
-                    <a:pt x="3652748" y="2515359"/>
-                  </a:lnTo>
-                  <a:lnTo>
-                    <a:pt x="3581126" y="2515190"/>
-                  </a:lnTo>
-                  <a:lnTo>
-                    <a:pt x="3509503" y="2515021"/>
-                  </a:lnTo>
-                  <a:lnTo>
-                    <a:pt x="3437881" y="2514852"/>
-                  </a:lnTo>
-                  <a:lnTo>
-                    <a:pt x="3366258" y="2514682"/>
-                  </a:lnTo>
-                  <a:lnTo>
-                    <a:pt x="3294636" y="2516273"/>
-                  </a:lnTo>
-                  <a:lnTo>
-                    <a:pt x="3223013" y="2538273"/>
-                  </a:lnTo>
-                  <a:lnTo>
-                    <a:pt x="3151391" y="2559716"/>
-                  </a:lnTo>
-                  <a:lnTo>
-                    <a:pt x="3079768" y="2580615"/>
-                  </a:lnTo>
-                  <a:lnTo>
-                    <a:pt x="3008146" y="2600984"/>
-                  </a:lnTo>
-                  <a:lnTo>
-                    <a:pt x="2936523" y="2620837"/>
-                  </a:lnTo>
-                  <a:lnTo>
-                    <a:pt x="2864901" y="2640187"/>
-                  </a:lnTo>
-                  <a:lnTo>
-                    <a:pt x="2793278" y="2659046"/>
-                  </a:lnTo>
-                  <a:lnTo>
-                    <a:pt x="2721655" y="2677428"/>
-                  </a:lnTo>
-                  <a:lnTo>
-                    <a:pt x="2650033" y="2695343"/>
-                  </a:lnTo>
-                  <a:lnTo>
-                    <a:pt x="2578410" y="2712804"/>
-                  </a:lnTo>
-                  <a:lnTo>
-                    <a:pt x="2506788" y="2729823"/>
-                  </a:lnTo>
-                  <a:lnTo>
-                    <a:pt x="2435165" y="2746410"/>
-                  </a:lnTo>
-                  <a:lnTo>
-                    <a:pt x="2363543" y="2762577"/>
-                  </a:lnTo>
-                  <a:lnTo>
-                    <a:pt x="2291920" y="2778334"/>
-                  </a:lnTo>
-                  <a:lnTo>
-                    <a:pt x="2220298" y="2793691"/>
-                  </a:lnTo>
-                  <a:lnTo>
-                    <a:pt x="2148675" y="2808660"/>
-                  </a:lnTo>
-                  <a:lnTo>
-                    <a:pt x="2077053" y="2823249"/>
-                  </a:lnTo>
-                  <a:lnTo>
-                    <a:pt x="2005430" y="2837468"/>
-                  </a:lnTo>
-                  <a:lnTo>
-                    <a:pt x="1933808" y="2851326"/>
-                  </a:lnTo>
-                  <a:lnTo>
-                    <a:pt x="1862185" y="2864834"/>
-                  </a:lnTo>
-                  <a:lnTo>
-                    <a:pt x="1790563" y="2877999"/>
-                  </a:lnTo>
-                  <a:lnTo>
-                    <a:pt x="1718940" y="2890830"/>
-                  </a:lnTo>
-                  <a:lnTo>
-                    <a:pt x="1647318" y="2903336"/>
-                  </a:lnTo>
-                  <a:lnTo>
-                    <a:pt x="1575695" y="2915525"/>
-                  </a:lnTo>
-                  <a:lnTo>
-                    <a:pt x="1504073" y="2927405"/>
-                  </a:lnTo>
-                  <a:lnTo>
-                    <a:pt x="1432450" y="2938984"/>
-                  </a:lnTo>
-                  <a:lnTo>
-                    <a:pt x="1360827" y="2950269"/>
-                  </a:lnTo>
-                  <a:lnTo>
-                    <a:pt x="1289205" y="2961269"/>
-                  </a:lnTo>
-                  <a:lnTo>
-                    <a:pt x="1217582" y="2971989"/>
-                  </a:lnTo>
-                  <a:lnTo>
-                    <a:pt x="1145960" y="2982438"/>
-                  </a:lnTo>
-                  <a:lnTo>
-                    <a:pt x="1074337" y="2992622"/>
-                  </a:lnTo>
-                  <a:lnTo>
-                    <a:pt x="1002715" y="3002548"/>
-                  </a:lnTo>
-                  <a:lnTo>
-                    <a:pt x="931092" y="3012222"/>
-                  </a:lnTo>
-                  <a:lnTo>
-                    <a:pt x="859470" y="3021651"/>
-                  </a:lnTo>
-                  <a:lnTo>
-                    <a:pt x="787847" y="3030841"/>
-                  </a:lnTo>
-                  <a:lnTo>
-                    <a:pt x="716225" y="3039798"/>
-                  </a:lnTo>
-                  <a:lnTo>
-                    <a:pt x="644602" y="3048528"/>
-                  </a:lnTo>
-                  <a:lnTo>
-                    <a:pt x="572980" y="3057037"/>
-                  </a:lnTo>
-                  <a:lnTo>
-                    <a:pt x="501357" y="3065330"/>
-                  </a:lnTo>
-                  <a:lnTo>
-                    <a:pt x="429735" y="3073412"/>
-                  </a:lnTo>
-                  <a:lnTo>
-                    <a:pt x="358112" y="3081290"/>
-                  </a:lnTo>
-                  <a:lnTo>
-                    <a:pt x="286490" y="3088969"/>
-                  </a:lnTo>
-                  <a:lnTo>
-                    <a:pt x="214867" y="3096452"/>
-                  </a:lnTo>
-                  <a:lnTo>
-                    <a:pt x="143245" y="3103746"/>
-                  </a:lnTo>
-                  <a:lnTo>
-                    <a:pt x="71622" y="3110855"/>
-                  </a:lnTo>
-                  <a:lnTo>
-                    <a:pt x="0" y="3117784"/>
+                    <a:pt x="7090630" y="2592954"/>
+                  </a:lnTo>
+                  <a:lnTo>
+                    <a:pt x="7019007" y="2593317"/>
+                  </a:lnTo>
+                  <a:lnTo>
+                    <a:pt x="6947385" y="2593679"/>
+                  </a:lnTo>
+                  <a:lnTo>
+                    <a:pt x="6875762" y="2594041"/>
+                  </a:lnTo>
+                  <a:lnTo>
+                    <a:pt x="6804139" y="2594403"/>
+                  </a:lnTo>
+                  <a:lnTo>
+                    <a:pt x="6732517" y="2594765"/>
+                  </a:lnTo>
+                  <a:lnTo>
+                    <a:pt x="6660894" y="2595126"/>
+                  </a:lnTo>
+                  <a:lnTo>
+                    <a:pt x="6589272" y="2595488"/>
+                  </a:lnTo>
+                  <a:lnTo>
+                    <a:pt x="6517649" y="2595849"/>
+                  </a:lnTo>
+                  <a:lnTo>
+                    <a:pt x="6446027" y="2596210"/>
+                  </a:lnTo>
+                  <a:lnTo>
+                    <a:pt x="6374404" y="2596571"/>
+                  </a:lnTo>
+                  <a:lnTo>
+                    <a:pt x="6302782" y="2596932"/>
+                  </a:lnTo>
+                  <a:lnTo>
+                    <a:pt x="6231159" y="2597293"/>
+                  </a:lnTo>
+                  <a:lnTo>
+                    <a:pt x="6159537" y="2597654"/>
+                  </a:lnTo>
+                  <a:lnTo>
+                    <a:pt x="6087914" y="2598014"/>
+                  </a:lnTo>
+                  <a:lnTo>
+                    <a:pt x="6016292" y="2598374"/>
+                  </a:lnTo>
+                  <a:lnTo>
+                    <a:pt x="5944669" y="2598735"/>
+                  </a:lnTo>
+                  <a:lnTo>
+                    <a:pt x="5873047" y="2599095"/>
+                  </a:lnTo>
+                  <a:lnTo>
+                    <a:pt x="5801424" y="2599454"/>
+                  </a:lnTo>
+                  <a:lnTo>
+                    <a:pt x="5729802" y="2599814"/>
+                  </a:lnTo>
+                  <a:lnTo>
+                    <a:pt x="5658179" y="2600174"/>
+                  </a:lnTo>
+                  <a:lnTo>
+                    <a:pt x="5586557" y="2600533"/>
+                  </a:lnTo>
+                  <a:lnTo>
+                    <a:pt x="5514934" y="2600892"/>
+                  </a:lnTo>
+                  <a:lnTo>
+                    <a:pt x="5443311" y="2601252"/>
+                  </a:lnTo>
+                  <a:lnTo>
+                    <a:pt x="5371689" y="2601611"/>
+                  </a:lnTo>
+                  <a:lnTo>
+                    <a:pt x="5300066" y="2601969"/>
+                  </a:lnTo>
+                  <a:lnTo>
+                    <a:pt x="5228444" y="2602328"/>
+                  </a:lnTo>
+                  <a:lnTo>
+                    <a:pt x="5156821" y="2602687"/>
+                  </a:lnTo>
+                  <a:lnTo>
+                    <a:pt x="5085199" y="2603045"/>
+                  </a:lnTo>
+                  <a:lnTo>
+                    <a:pt x="5013576" y="2603403"/>
+                  </a:lnTo>
+                  <a:lnTo>
+                    <a:pt x="4941954" y="2603761"/>
+                  </a:lnTo>
+                  <a:lnTo>
+                    <a:pt x="4870331" y="2604119"/>
+                  </a:lnTo>
+                  <a:lnTo>
+                    <a:pt x="4798709" y="2604477"/>
+                  </a:lnTo>
+                  <a:lnTo>
+                    <a:pt x="4727086" y="2604835"/>
+                  </a:lnTo>
+                  <a:lnTo>
+                    <a:pt x="4655464" y="2605192"/>
+                  </a:lnTo>
+                  <a:lnTo>
+                    <a:pt x="4583841" y="2605550"/>
+                  </a:lnTo>
+                  <a:lnTo>
+                    <a:pt x="4512219" y="2605907"/>
+                  </a:lnTo>
+                  <a:lnTo>
+                    <a:pt x="4440596" y="2606264"/>
+                  </a:lnTo>
+                  <a:lnTo>
+                    <a:pt x="4368974" y="2606621"/>
+                  </a:lnTo>
+                  <a:lnTo>
+                    <a:pt x="4297351" y="2606978"/>
+                  </a:lnTo>
+                  <a:lnTo>
+                    <a:pt x="4225729" y="2607335"/>
+                  </a:lnTo>
+                  <a:lnTo>
+                    <a:pt x="4154106" y="2607691"/>
+                  </a:lnTo>
+                  <a:lnTo>
+                    <a:pt x="4082483" y="2608047"/>
+                  </a:lnTo>
+                  <a:lnTo>
+                    <a:pt x="4010861" y="2608404"/>
+                  </a:lnTo>
+                  <a:lnTo>
+                    <a:pt x="3939238" y="2608760"/>
+                  </a:lnTo>
+                  <a:lnTo>
+                    <a:pt x="3867616" y="2609116"/>
+                  </a:lnTo>
+                  <a:lnTo>
+                    <a:pt x="3795993" y="2609471"/>
+                  </a:lnTo>
+                  <a:lnTo>
+                    <a:pt x="3724371" y="2609827"/>
+                  </a:lnTo>
+                  <a:lnTo>
+                    <a:pt x="3652748" y="2610183"/>
+                  </a:lnTo>
+                  <a:lnTo>
+                    <a:pt x="3581126" y="2610538"/>
+                  </a:lnTo>
+                  <a:lnTo>
+                    <a:pt x="3509503" y="2610893"/>
+                  </a:lnTo>
+                  <a:lnTo>
+                    <a:pt x="3437881" y="2611248"/>
+                  </a:lnTo>
+                  <a:lnTo>
+                    <a:pt x="3366258" y="2611603"/>
+                  </a:lnTo>
+                  <a:lnTo>
+                    <a:pt x="3294636" y="2611958"/>
+                  </a:lnTo>
+                  <a:lnTo>
+                    <a:pt x="3223013" y="2633536"/>
+                  </a:lnTo>
+                  <a:lnTo>
+                    <a:pt x="3151391" y="2655429"/>
+                  </a:lnTo>
+                  <a:lnTo>
+                    <a:pt x="3079768" y="2676757"/>
+                  </a:lnTo>
+                  <a:lnTo>
+                    <a:pt x="3008146" y="2697534"/>
+                  </a:lnTo>
+                  <a:lnTo>
+                    <a:pt x="2936523" y="2717775"/>
+                  </a:lnTo>
+                  <a:lnTo>
+                    <a:pt x="2864901" y="2737493"/>
+                  </a:lnTo>
+                  <a:lnTo>
+                    <a:pt x="2793278" y="2756703"/>
+                  </a:lnTo>
+                  <a:lnTo>
+                    <a:pt x="2721655" y="2775416"/>
+                  </a:lnTo>
+                  <a:lnTo>
+                    <a:pt x="2650033" y="2793647"/>
+                  </a:lnTo>
+                  <a:lnTo>
+                    <a:pt x="2578410" y="2811407"/>
+                  </a:lnTo>
+                  <a:lnTo>
+                    <a:pt x="2506788" y="2828708"/>
+                  </a:lnTo>
+                  <a:lnTo>
+                    <a:pt x="2435165" y="2845563"/>
+                  </a:lnTo>
+                  <a:lnTo>
+                    <a:pt x="2363543" y="2861983"/>
+                  </a:lnTo>
+                  <a:lnTo>
+                    <a:pt x="2291920" y="2877979"/>
+                  </a:lnTo>
+                  <a:lnTo>
+                    <a:pt x="2220298" y="2893562"/>
+                  </a:lnTo>
+                  <a:lnTo>
+                    <a:pt x="2148675" y="2908742"/>
+                  </a:lnTo>
+                  <a:lnTo>
+                    <a:pt x="2077053" y="2923531"/>
+                  </a:lnTo>
+                  <a:lnTo>
+                    <a:pt x="2005430" y="2937938"/>
+                  </a:lnTo>
+                  <a:lnTo>
+                    <a:pt x="1933808" y="2951974"/>
+                  </a:lnTo>
+                  <a:lnTo>
+                    <a:pt x="1862185" y="2965646"/>
+                  </a:lnTo>
+                  <a:lnTo>
+                    <a:pt x="1790563" y="2978966"/>
+                  </a:lnTo>
+                  <a:lnTo>
+                    <a:pt x="1718940" y="2991942"/>
+                  </a:lnTo>
+                  <a:lnTo>
+                    <a:pt x="1647318" y="3004584"/>
+                  </a:lnTo>
+                  <a:lnTo>
+                    <a:pt x="1575695" y="3016898"/>
+                  </a:lnTo>
+                  <a:lnTo>
+                    <a:pt x="1504073" y="3028895"/>
+                  </a:lnTo>
+                  <a:lnTo>
+                    <a:pt x="1432450" y="3040583"/>
+                  </a:lnTo>
+                  <a:lnTo>
+                    <a:pt x="1360827" y="3051968"/>
+                  </a:lnTo>
+                  <a:lnTo>
+                    <a:pt x="1289205" y="3063060"/>
+                  </a:lnTo>
+                  <a:lnTo>
+                    <a:pt x="1217582" y="3073865"/>
+                  </a:lnTo>
+                  <a:lnTo>
+                    <a:pt x="1145960" y="3084392"/>
+                  </a:lnTo>
+                  <a:lnTo>
+                    <a:pt x="1074337" y="3094646"/>
+                  </a:lnTo>
+                  <a:lnTo>
+                    <a:pt x="1002715" y="3104636"/>
+                  </a:lnTo>
+                  <a:lnTo>
+                    <a:pt x="931092" y="3114368"/>
+                  </a:lnTo>
+                  <a:lnTo>
+                    <a:pt x="859470" y="3123849"/>
+                  </a:lnTo>
+                  <a:lnTo>
+                    <a:pt x="787847" y="3133085"/>
+                  </a:lnTo>
+                  <a:lnTo>
+                    <a:pt x="716225" y="3142083"/>
+                  </a:lnTo>
+                  <a:lnTo>
+                    <a:pt x="644602" y="3150849"/>
+                  </a:lnTo>
+                  <a:lnTo>
+                    <a:pt x="572980" y="3159388"/>
+                  </a:lnTo>
+                  <a:lnTo>
+                    <a:pt x="501357" y="3167707"/>
+                  </a:lnTo>
+                  <a:lnTo>
+                    <a:pt x="429735" y="3175811"/>
+                  </a:lnTo>
+                  <a:lnTo>
+                    <a:pt x="358112" y="3183705"/>
+                  </a:lnTo>
+                  <a:lnTo>
+                    <a:pt x="286490" y="3191396"/>
+                  </a:lnTo>
+                  <a:lnTo>
+                    <a:pt x="214867" y="3198889"/>
+                  </a:lnTo>
+                  <a:lnTo>
+                    <a:pt x="143245" y="3206188"/>
+                  </a:lnTo>
+                  <a:lnTo>
+                    <a:pt x="71622" y="3213299"/>
+                  </a:lnTo>
+                  <a:lnTo>
+                    <a:pt x="0" y="3220226"/>
                   </a:lnTo>
                   <a:close/>
                 </a:path>
@@ -3590,309 +3590,309 @@
           </p:nvSpPr>
           <p:spPr>
             <a:xfrm>
-              <a:off x="1172049" y="2165003"/>
-              <a:ext cx="7090630" cy="2514513"/>
+              <a:off x="1172049" y="2067557"/>
+              <a:ext cx="7090630" cy="2628122"/>
             </a:xfrm>
             <a:custGeom>
               <a:avLst/>
               <a:pathLst>
-                <a:path w="7090630" h="2514513">
+                <a:path w="7090630" h="2628122">
                   <a:moveTo>
-                    <a:pt x="0" y="2506699"/>
+                    <a:pt x="0" y="2628122"/>
                   </a:moveTo>
                   <a:lnTo>
-                    <a:pt x="71622" y="2506869"/>
-                  </a:lnTo>
-                  <a:lnTo>
-                    <a:pt x="143245" y="2507040"/>
-                  </a:lnTo>
-                  <a:lnTo>
-                    <a:pt x="214867" y="2507210"/>
-                  </a:lnTo>
-                  <a:lnTo>
-                    <a:pt x="286490" y="2507381"/>
-                  </a:lnTo>
-                  <a:lnTo>
-                    <a:pt x="358112" y="2507551"/>
-                  </a:lnTo>
-                  <a:lnTo>
-                    <a:pt x="429735" y="2507722"/>
-                  </a:lnTo>
-                  <a:lnTo>
-                    <a:pt x="501357" y="2507892"/>
-                  </a:lnTo>
-                  <a:lnTo>
-                    <a:pt x="572980" y="2508063"/>
-                  </a:lnTo>
-                  <a:lnTo>
-                    <a:pt x="644602" y="2508233"/>
-                  </a:lnTo>
-                  <a:lnTo>
-                    <a:pt x="716225" y="2508403"/>
-                  </a:lnTo>
-                  <a:lnTo>
-                    <a:pt x="787847" y="2508574"/>
-                  </a:lnTo>
-                  <a:lnTo>
-                    <a:pt x="859470" y="2508744"/>
-                  </a:lnTo>
-                  <a:lnTo>
-                    <a:pt x="931092" y="2508914"/>
-                  </a:lnTo>
-                  <a:lnTo>
-                    <a:pt x="1002715" y="2509084"/>
-                  </a:lnTo>
-                  <a:lnTo>
-                    <a:pt x="1074337" y="2509255"/>
-                  </a:lnTo>
-                  <a:lnTo>
-                    <a:pt x="1145960" y="2509425"/>
-                  </a:lnTo>
-                  <a:lnTo>
-                    <a:pt x="1217582" y="2509595"/>
-                  </a:lnTo>
-                  <a:lnTo>
-                    <a:pt x="1289205" y="2509765"/>
-                  </a:lnTo>
-                  <a:lnTo>
-                    <a:pt x="1360827" y="2509935"/>
-                  </a:lnTo>
-                  <a:lnTo>
-                    <a:pt x="1432450" y="2510105"/>
-                  </a:lnTo>
-                  <a:lnTo>
-                    <a:pt x="1504073" y="2510275"/>
-                  </a:lnTo>
-                  <a:lnTo>
-                    <a:pt x="1575695" y="2510445"/>
-                  </a:lnTo>
-                  <a:lnTo>
-                    <a:pt x="1647318" y="2510615"/>
-                  </a:lnTo>
-                  <a:lnTo>
-                    <a:pt x="1718940" y="2510785"/>
-                  </a:lnTo>
-                  <a:lnTo>
-                    <a:pt x="1790563" y="2510954"/>
-                  </a:lnTo>
-                  <a:lnTo>
-                    <a:pt x="1862185" y="2511124"/>
-                  </a:lnTo>
-                  <a:lnTo>
-                    <a:pt x="1933808" y="2511294"/>
-                  </a:lnTo>
-                  <a:lnTo>
-                    <a:pt x="2005430" y="2511464"/>
-                  </a:lnTo>
-                  <a:lnTo>
-                    <a:pt x="2077053" y="2511633"/>
-                  </a:lnTo>
-                  <a:lnTo>
-                    <a:pt x="2148675" y="2511803"/>
-                  </a:lnTo>
-                  <a:lnTo>
-                    <a:pt x="2220298" y="2511973"/>
-                  </a:lnTo>
-                  <a:lnTo>
-                    <a:pt x="2291920" y="2512142"/>
-                  </a:lnTo>
-                  <a:lnTo>
-                    <a:pt x="2363543" y="2512312"/>
-                  </a:lnTo>
-                  <a:lnTo>
-                    <a:pt x="2435165" y="2512481"/>
-                  </a:lnTo>
-                  <a:lnTo>
-                    <a:pt x="2506788" y="2512651"/>
-                  </a:lnTo>
-                  <a:lnTo>
-                    <a:pt x="2578410" y="2512820"/>
-                  </a:lnTo>
-                  <a:lnTo>
-                    <a:pt x="2650033" y="2512990"/>
-                  </a:lnTo>
-                  <a:lnTo>
-                    <a:pt x="2721655" y="2513159"/>
-                  </a:lnTo>
-                  <a:lnTo>
-                    <a:pt x="2793278" y="2513329"/>
-                  </a:lnTo>
-                  <a:lnTo>
-                    <a:pt x="2864901" y="2513498"/>
-                  </a:lnTo>
-                  <a:lnTo>
-                    <a:pt x="2936523" y="2513667"/>
-                  </a:lnTo>
-                  <a:lnTo>
-                    <a:pt x="3008146" y="2513837"/>
-                  </a:lnTo>
-                  <a:lnTo>
-                    <a:pt x="3079768" y="2514006"/>
-                  </a:lnTo>
-                  <a:lnTo>
-                    <a:pt x="3151391" y="2514175"/>
-                  </a:lnTo>
-                  <a:lnTo>
-                    <a:pt x="3223013" y="2514344"/>
-                  </a:lnTo>
-                  <a:lnTo>
-                    <a:pt x="3294636" y="2514513"/>
-                  </a:lnTo>
-                  <a:lnTo>
-                    <a:pt x="3366258" y="2493701"/>
-                  </a:lnTo>
-                  <a:lnTo>
-                    <a:pt x="3437881" y="2470541"/>
-                  </a:lnTo>
-                  <a:lnTo>
-                    <a:pt x="3509503" y="2446779"/>
-                  </a:lnTo>
-                  <a:lnTo>
-                    <a:pt x="3581126" y="2422400"/>
-                  </a:lnTo>
-                  <a:lnTo>
-                    <a:pt x="3652748" y="2397386"/>
-                  </a:lnTo>
-                  <a:lnTo>
-                    <a:pt x="3724371" y="2371721"/>
-                  </a:lnTo>
-                  <a:lnTo>
-                    <a:pt x="3795993" y="2345390"/>
-                  </a:lnTo>
-                  <a:lnTo>
-                    <a:pt x="3867616" y="2318373"/>
-                  </a:lnTo>
-                  <a:lnTo>
-                    <a:pt x="3939238" y="2290654"/>
-                  </a:lnTo>
-                  <a:lnTo>
-                    <a:pt x="4010861" y="2262213"/>
-                  </a:lnTo>
-                  <a:lnTo>
-                    <a:pt x="4082483" y="2233034"/>
-                  </a:lnTo>
-                  <a:lnTo>
-                    <a:pt x="4154106" y="2203095"/>
-                  </a:lnTo>
-                  <a:lnTo>
-                    <a:pt x="4225729" y="2172378"/>
-                  </a:lnTo>
-                  <a:lnTo>
-                    <a:pt x="4297351" y="2140861"/>
-                  </a:lnTo>
-                  <a:lnTo>
-                    <a:pt x="4368974" y="2108526"/>
-                  </a:lnTo>
-                  <a:lnTo>
-                    <a:pt x="4440596" y="2075349"/>
-                  </a:lnTo>
-                  <a:lnTo>
-                    <a:pt x="4512219" y="2041309"/>
-                  </a:lnTo>
-                  <a:lnTo>
-                    <a:pt x="4583841" y="2006384"/>
-                  </a:lnTo>
-                  <a:lnTo>
-                    <a:pt x="4655464" y="1970551"/>
-                  </a:lnTo>
-                  <a:lnTo>
-                    <a:pt x="4727086" y="1933786"/>
-                  </a:lnTo>
-                  <a:lnTo>
-                    <a:pt x="4798709" y="1896065"/>
-                  </a:lnTo>
-                  <a:lnTo>
-                    <a:pt x="4870331" y="1857362"/>
-                  </a:lnTo>
-                  <a:lnTo>
-                    <a:pt x="4941954" y="1817653"/>
-                  </a:lnTo>
-                  <a:lnTo>
-                    <a:pt x="5013576" y="1776912"/>
-                  </a:lnTo>
-                  <a:lnTo>
-                    <a:pt x="5085199" y="1735111"/>
-                  </a:lnTo>
-                  <a:lnTo>
-                    <a:pt x="5156821" y="1692222"/>
-                  </a:lnTo>
-                  <a:lnTo>
-                    <a:pt x="5228444" y="1648219"/>
-                  </a:lnTo>
-                  <a:lnTo>
-                    <a:pt x="5300066" y="1603071"/>
-                  </a:lnTo>
-                  <a:lnTo>
-                    <a:pt x="5371689" y="1556748"/>
-                  </a:lnTo>
-                  <a:lnTo>
-                    <a:pt x="5443311" y="1509221"/>
-                  </a:lnTo>
-                  <a:lnTo>
-                    <a:pt x="5514934" y="1460458"/>
-                  </a:lnTo>
-                  <a:lnTo>
-                    <a:pt x="5586557" y="1410427"/>
-                  </a:lnTo>
-                  <a:lnTo>
-                    <a:pt x="5658179" y="1359095"/>
-                  </a:lnTo>
-                  <a:lnTo>
-                    <a:pt x="5729802" y="1306427"/>
-                  </a:lnTo>
-                  <a:lnTo>
-                    <a:pt x="5801424" y="1252390"/>
-                  </a:lnTo>
-                  <a:lnTo>
-                    <a:pt x="5873047" y="1196948"/>
-                  </a:lnTo>
-                  <a:lnTo>
-                    <a:pt x="5944669" y="1140063"/>
-                  </a:lnTo>
-                  <a:lnTo>
-                    <a:pt x="6016292" y="1081699"/>
-                  </a:lnTo>
-                  <a:lnTo>
-                    <a:pt x="6087914" y="1021818"/>
-                  </a:lnTo>
-                  <a:lnTo>
-                    <a:pt x="6159537" y="960379"/>
-                  </a:lnTo>
-                  <a:lnTo>
-                    <a:pt x="6231159" y="897342"/>
-                  </a:lnTo>
-                  <a:lnTo>
-                    <a:pt x="6302782" y="832665"/>
-                  </a:lnTo>
-                  <a:lnTo>
-                    <a:pt x="6374404" y="766307"/>
-                  </a:lnTo>
-                  <a:lnTo>
-                    <a:pt x="6446027" y="698223"/>
-                  </a:lnTo>
-                  <a:lnTo>
-                    <a:pt x="6517649" y="628368"/>
-                  </a:lnTo>
-                  <a:lnTo>
-                    <a:pt x="6589272" y="556697"/>
-                  </a:lnTo>
-                  <a:lnTo>
-                    <a:pt x="6660894" y="483161"/>
-                  </a:lnTo>
-                  <a:lnTo>
-                    <a:pt x="6732517" y="407713"/>
-                  </a:lnTo>
-                  <a:lnTo>
-                    <a:pt x="6804139" y="330303"/>
-                  </a:lnTo>
-                  <a:lnTo>
-                    <a:pt x="6875762" y="250879"/>
-                  </a:lnTo>
-                  <a:lnTo>
-                    <a:pt x="6947385" y="169390"/>
-                  </a:lnTo>
-                  <a:lnTo>
-                    <a:pt x="7019007" y="85782"/>
+                    <a:pt x="71622" y="2627774"/>
+                  </a:lnTo>
+                  <a:lnTo>
+                    <a:pt x="143245" y="2627425"/>
+                  </a:lnTo>
+                  <a:lnTo>
+                    <a:pt x="214867" y="2627077"/>
+                  </a:lnTo>
+                  <a:lnTo>
+                    <a:pt x="286490" y="2626728"/>
+                  </a:lnTo>
+                  <a:lnTo>
+                    <a:pt x="358112" y="2626380"/>
+                  </a:lnTo>
+                  <a:lnTo>
+                    <a:pt x="429735" y="2626031"/>
+                  </a:lnTo>
+                  <a:lnTo>
+                    <a:pt x="501357" y="2625682"/>
+                  </a:lnTo>
+                  <a:lnTo>
+                    <a:pt x="572980" y="2625333"/>
+                  </a:lnTo>
+                  <a:lnTo>
+                    <a:pt x="644602" y="2624983"/>
+                  </a:lnTo>
+                  <a:lnTo>
+                    <a:pt x="716225" y="2624634"/>
+                  </a:lnTo>
+                  <a:lnTo>
+                    <a:pt x="787847" y="2624284"/>
+                  </a:lnTo>
+                  <a:lnTo>
+                    <a:pt x="859470" y="2623934"/>
+                  </a:lnTo>
+                  <a:lnTo>
+                    <a:pt x="931092" y="2623585"/>
+                  </a:lnTo>
+                  <a:lnTo>
+                    <a:pt x="1002715" y="2623235"/>
+                  </a:lnTo>
+                  <a:lnTo>
+                    <a:pt x="1074337" y="2622884"/>
+                  </a:lnTo>
+                  <a:lnTo>
+                    <a:pt x="1145960" y="2622534"/>
+                  </a:lnTo>
+                  <a:lnTo>
+                    <a:pt x="1217582" y="2622184"/>
+                  </a:lnTo>
+                  <a:lnTo>
+                    <a:pt x="1289205" y="2621833"/>
+                  </a:lnTo>
+                  <a:lnTo>
+                    <a:pt x="1360827" y="2621482"/>
+                  </a:lnTo>
+                  <a:lnTo>
+                    <a:pt x="1432450" y="2621131"/>
+                  </a:lnTo>
+                  <a:lnTo>
+                    <a:pt x="1504073" y="2620780"/>
+                  </a:lnTo>
+                  <a:lnTo>
+                    <a:pt x="1575695" y="2620429"/>
+                  </a:lnTo>
+                  <a:lnTo>
+                    <a:pt x="1647318" y="2620078"/>
+                  </a:lnTo>
+                  <a:lnTo>
+                    <a:pt x="1718940" y="2619726"/>
+                  </a:lnTo>
+                  <a:lnTo>
+                    <a:pt x="1790563" y="2619375"/>
+                  </a:lnTo>
+                  <a:lnTo>
+                    <a:pt x="1862185" y="2619023"/>
+                  </a:lnTo>
+                  <a:lnTo>
+                    <a:pt x="1933808" y="2618671"/>
+                  </a:lnTo>
+                  <a:lnTo>
+                    <a:pt x="2005430" y="2618319"/>
+                  </a:lnTo>
+                  <a:lnTo>
+                    <a:pt x="2077053" y="2617967"/>
+                  </a:lnTo>
+                  <a:lnTo>
+                    <a:pt x="2148675" y="2617615"/>
+                  </a:lnTo>
+                  <a:lnTo>
+                    <a:pt x="2220298" y="2617262"/>
+                  </a:lnTo>
+                  <a:lnTo>
+                    <a:pt x="2291920" y="2616910"/>
+                  </a:lnTo>
+                  <a:lnTo>
+                    <a:pt x="2363543" y="2616557"/>
+                  </a:lnTo>
+                  <a:lnTo>
+                    <a:pt x="2435165" y="2616204"/>
+                  </a:lnTo>
+                  <a:lnTo>
+                    <a:pt x="2506788" y="2615851"/>
+                  </a:lnTo>
+                  <a:lnTo>
+                    <a:pt x="2578410" y="2615498"/>
+                  </a:lnTo>
+                  <a:lnTo>
+                    <a:pt x="2650033" y="2615144"/>
+                  </a:lnTo>
+                  <a:lnTo>
+                    <a:pt x="2721655" y="2614791"/>
+                  </a:lnTo>
+                  <a:lnTo>
+                    <a:pt x="2793278" y="2614437"/>
+                  </a:lnTo>
+                  <a:lnTo>
+                    <a:pt x="2864901" y="2614084"/>
+                  </a:lnTo>
+                  <a:lnTo>
+                    <a:pt x="2936523" y="2613730"/>
+                  </a:lnTo>
+                  <a:lnTo>
+                    <a:pt x="3008146" y="2613376"/>
+                  </a:lnTo>
+                  <a:lnTo>
+                    <a:pt x="3079768" y="2613021"/>
+                  </a:lnTo>
+                  <a:lnTo>
+                    <a:pt x="3151391" y="2612667"/>
+                  </a:lnTo>
+                  <a:lnTo>
+                    <a:pt x="3223013" y="2612313"/>
+                  </a:lnTo>
+                  <a:lnTo>
+                    <a:pt x="3294636" y="2611063"/>
+                  </a:lnTo>
+                  <a:lnTo>
+                    <a:pt x="3366258" y="2587994"/>
+                  </a:lnTo>
+                  <a:lnTo>
+                    <a:pt x="3437881" y="2564315"/>
+                  </a:lnTo>
+                  <a:lnTo>
+                    <a:pt x="3509503" y="2540007"/>
+                  </a:lnTo>
+                  <a:lnTo>
+                    <a:pt x="3581126" y="2515056"/>
+                  </a:lnTo>
+                  <a:lnTo>
+                    <a:pt x="3652748" y="2489444"/>
+                  </a:lnTo>
+                  <a:lnTo>
+                    <a:pt x="3724371" y="2463152"/>
+                  </a:lnTo>
+                  <a:lnTo>
+                    <a:pt x="3795993" y="2436164"/>
+                  </a:lnTo>
+                  <a:lnTo>
+                    <a:pt x="3867616" y="2408462"/>
+                  </a:lnTo>
+                  <a:lnTo>
+                    <a:pt x="3939238" y="2380025"/>
+                  </a:lnTo>
+                  <a:lnTo>
+                    <a:pt x="4010861" y="2350834"/>
+                  </a:lnTo>
+                  <a:lnTo>
+                    <a:pt x="4082483" y="2320870"/>
+                  </a:lnTo>
+                  <a:lnTo>
+                    <a:pt x="4154106" y="2290112"/>
+                  </a:lnTo>
+                  <a:lnTo>
+                    <a:pt x="4225729" y="2258539"/>
+                  </a:lnTo>
+                  <a:lnTo>
+                    <a:pt x="4297351" y="2226129"/>
+                  </a:lnTo>
+                  <a:lnTo>
+                    <a:pt x="4368974" y="2192861"/>
+                  </a:lnTo>
+                  <a:lnTo>
+                    <a:pt x="4440596" y="2158711"/>
+                  </a:lnTo>
+                  <a:lnTo>
+                    <a:pt x="4512219" y="2123656"/>
+                  </a:lnTo>
+                  <a:lnTo>
+                    <a:pt x="4583841" y="2087672"/>
+                  </a:lnTo>
+                  <a:lnTo>
+                    <a:pt x="4655464" y="2050735"/>
+                  </a:lnTo>
+                  <a:lnTo>
+                    <a:pt x="4727086" y="2012819"/>
+                  </a:lnTo>
+                  <a:lnTo>
+                    <a:pt x="4798709" y="1973899"/>
+                  </a:lnTo>
+                  <a:lnTo>
+                    <a:pt x="4870331" y="1933947"/>
+                  </a:lnTo>
+                  <a:lnTo>
+                    <a:pt x="4941954" y="1892936"/>
+                  </a:lnTo>
+                  <a:lnTo>
+                    <a:pt x="5013576" y="1850839"/>
+                  </a:lnTo>
+                  <a:lnTo>
+                    <a:pt x="5085199" y="1807626"/>
+                  </a:lnTo>
+                  <a:lnTo>
+                    <a:pt x="5156821" y="1763268"/>
+                  </a:lnTo>
+                  <a:lnTo>
+                    <a:pt x="5228444" y="1717735"/>
+                  </a:lnTo>
+                  <a:lnTo>
+                    <a:pt x="5300066" y="1670995"/>
+                  </a:lnTo>
+                  <a:lnTo>
+                    <a:pt x="5371689" y="1623017"/>
+                  </a:lnTo>
+                  <a:lnTo>
+                    <a:pt x="5443311" y="1573768"/>
+                  </a:lnTo>
+                  <a:lnTo>
+                    <a:pt x="5514934" y="1523213"/>
+                  </a:lnTo>
+                  <a:lnTo>
+                    <a:pt x="5586557" y="1471319"/>
+                  </a:lnTo>
+                  <a:lnTo>
+                    <a:pt x="5658179" y="1418050"/>
+                  </a:lnTo>
+                  <a:lnTo>
+                    <a:pt x="5729802" y="1363369"/>
+                  </a:lnTo>
+                  <a:lnTo>
+                    <a:pt x="5801424" y="1307240"/>
+                  </a:lnTo>
+                  <a:lnTo>
+                    <a:pt x="5873047" y="1249623"/>
+                  </a:lnTo>
+                  <a:lnTo>
+                    <a:pt x="5944669" y="1190479"/>
+                  </a:lnTo>
+                  <a:lnTo>
+                    <a:pt x="6016292" y="1129769"/>
+                  </a:lnTo>
+                  <a:lnTo>
+                    <a:pt x="6087914" y="1067449"/>
+                  </a:lnTo>
+                  <a:lnTo>
+                    <a:pt x="6159537" y="1003478"/>
+                  </a:lnTo>
+                  <a:lnTo>
+                    <a:pt x="6231159" y="937812"/>
+                  </a:lnTo>
+                  <a:lnTo>
+                    <a:pt x="6302782" y="870407"/>
+                  </a:lnTo>
+                  <a:lnTo>
+                    <a:pt x="6374404" y="801215"/>
+                  </a:lnTo>
+                  <a:lnTo>
+                    <a:pt x="6446027" y="730189"/>
+                  </a:lnTo>
+                  <a:lnTo>
+                    <a:pt x="6517649" y="657282"/>
+                  </a:lnTo>
+                  <a:lnTo>
+                    <a:pt x="6589272" y="582443"/>
+                  </a:lnTo>
+                  <a:lnTo>
+                    <a:pt x="6660894" y="505620"/>
+                  </a:lnTo>
+                  <a:lnTo>
+                    <a:pt x="6732517" y="426762"/>
+                  </a:lnTo>
+                  <a:lnTo>
+                    <a:pt x="6804139" y="345815"/>
+                  </a:lnTo>
+                  <a:lnTo>
+                    <a:pt x="6875762" y="262722"/>
+                  </a:lnTo>
+                  <a:lnTo>
+                    <a:pt x="6947385" y="177428"/>
+                  </a:lnTo>
+                  <a:lnTo>
+                    <a:pt x="7019007" y="89874"/>
                   </a:lnTo>
                   <a:lnTo>
                     <a:pt x="7090630" y="0"/>
@@ -3915,312 +3915,312 @@
           </p:nvSpPr>
           <p:spPr>
             <a:xfrm>
-              <a:off x="1172049" y="4679686"/>
-              <a:ext cx="7090630" cy="603101"/>
+              <a:off x="1172049" y="4660512"/>
+              <a:ext cx="7090630" cy="627271"/>
             </a:xfrm>
             <a:custGeom>
               <a:avLst/>
               <a:pathLst>
-                <a:path w="7090630" h="603101">
+                <a:path w="7090630" h="627271">
                   <a:moveTo>
-                    <a:pt x="7090630" y="8748"/>
+                    <a:pt x="7090630" y="0"/>
                   </a:moveTo>
                   <a:lnTo>
-                    <a:pt x="7019007" y="8581"/>
-                  </a:lnTo>
-                  <a:lnTo>
-                    <a:pt x="6947385" y="8413"/>
-                  </a:lnTo>
-                  <a:lnTo>
-                    <a:pt x="6875762" y="8246"/>
-                  </a:lnTo>
-                  <a:lnTo>
-                    <a:pt x="6804139" y="8078"/>
-                  </a:lnTo>
-                  <a:lnTo>
-                    <a:pt x="6732517" y="7911"/>
-                  </a:lnTo>
-                  <a:lnTo>
-                    <a:pt x="6660894" y="7743"/>
-                  </a:lnTo>
-                  <a:lnTo>
-                    <a:pt x="6589272" y="7576"/>
-                  </a:lnTo>
-                  <a:lnTo>
-                    <a:pt x="6517649" y="7408"/>
-                  </a:lnTo>
-                  <a:lnTo>
-                    <a:pt x="6446027" y="7240"/>
-                  </a:lnTo>
-                  <a:lnTo>
-                    <a:pt x="6374404" y="7073"/>
-                  </a:lnTo>
-                  <a:lnTo>
-                    <a:pt x="6302782" y="6905"/>
-                  </a:lnTo>
-                  <a:lnTo>
-                    <a:pt x="6231159" y="6737"/>
-                  </a:lnTo>
-                  <a:lnTo>
-                    <a:pt x="6159537" y="6569"/>
-                  </a:lnTo>
-                  <a:lnTo>
-                    <a:pt x="6087914" y="6401"/>
-                  </a:lnTo>
-                  <a:lnTo>
-                    <a:pt x="6016292" y="6234"/>
-                  </a:lnTo>
-                  <a:lnTo>
-                    <a:pt x="5944669" y="6066"/>
-                  </a:lnTo>
-                  <a:lnTo>
-                    <a:pt x="5873047" y="5898"/>
-                  </a:lnTo>
-                  <a:lnTo>
-                    <a:pt x="5801424" y="5730"/>
-                  </a:lnTo>
-                  <a:lnTo>
-                    <a:pt x="5729802" y="5562"/>
-                  </a:lnTo>
-                  <a:lnTo>
-                    <a:pt x="5658179" y="5394"/>
-                  </a:lnTo>
-                  <a:lnTo>
-                    <a:pt x="5586557" y="5226"/>
-                  </a:lnTo>
-                  <a:lnTo>
-                    <a:pt x="5514934" y="5058"/>
-                  </a:lnTo>
-                  <a:lnTo>
-                    <a:pt x="5443311" y="4889"/>
-                  </a:lnTo>
-                  <a:lnTo>
-                    <a:pt x="5371689" y="4721"/>
-                  </a:lnTo>
-                  <a:lnTo>
-                    <a:pt x="5300066" y="4553"/>
-                  </a:lnTo>
-                  <a:lnTo>
-                    <a:pt x="5228444" y="4385"/>
-                  </a:lnTo>
-                  <a:lnTo>
-                    <a:pt x="5156821" y="4217"/>
-                  </a:lnTo>
-                  <a:lnTo>
-                    <a:pt x="5085199" y="4048"/>
-                  </a:lnTo>
-                  <a:lnTo>
-                    <a:pt x="5013576" y="3880"/>
-                  </a:lnTo>
-                  <a:lnTo>
-                    <a:pt x="4941954" y="3712"/>
-                  </a:lnTo>
-                  <a:lnTo>
-                    <a:pt x="4870331" y="3543"/>
-                  </a:lnTo>
-                  <a:lnTo>
-                    <a:pt x="4798709" y="3375"/>
-                  </a:lnTo>
-                  <a:lnTo>
-                    <a:pt x="4727086" y="3206"/>
-                  </a:lnTo>
-                  <a:lnTo>
-                    <a:pt x="4655464" y="3038"/>
-                  </a:lnTo>
-                  <a:lnTo>
-                    <a:pt x="4583841" y="2869"/>
-                  </a:lnTo>
-                  <a:lnTo>
-                    <a:pt x="4512219" y="2701"/>
-                  </a:lnTo>
-                  <a:lnTo>
-                    <a:pt x="4440596" y="2532"/>
-                  </a:lnTo>
-                  <a:lnTo>
-                    <a:pt x="4368974" y="2364"/>
-                  </a:lnTo>
-                  <a:lnTo>
-                    <a:pt x="4297351" y="2195"/>
-                  </a:lnTo>
-                  <a:lnTo>
-                    <a:pt x="4225729" y="2026"/>
-                  </a:lnTo>
-                  <a:lnTo>
-                    <a:pt x="4154106" y="1858"/>
-                  </a:lnTo>
-                  <a:lnTo>
-                    <a:pt x="4082483" y="1689"/>
-                  </a:lnTo>
-                  <a:lnTo>
-                    <a:pt x="4010861" y="1520"/>
-                  </a:lnTo>
-                  <a:lnTo>
-                    <a:pt x="3939238" y="1351"/>
-                  </a:lnTo>
-                  <a:lnTo>
-                    <a:pt x="3867616" y="1182"/>
-                  </a:lnTo>
-                  <a:lnTo>
-                    <a:pt x="3795993" y="1013"/>
-                  </a:lnTo>
-                  <a:lnTo>
-                    <a:pt x="3724371" y="845"/>
-                  </a:lnTo>
-                  <a:lnTo>
-                    <a:pt x="3652748" y="676"/>
-                  </a:lnTo>
-                  <a:lnTo>
-                    <a:pt x="3581126" y="507"/>
-                  </a:lnTo>
-                  <a:lnTo>
-                    <a:pt x="3509503" y="338"/>
-                  </a:lnTo>
-                  <a:lnTo>
-                    <a:pt x="3437881" y="169"/>
-                  </a:lnTo>
-                  <a:lnTo>
-                    <a:pt x="3366258" y="0"/>
-                  </a:lnTo>
-                  <a:lnTo>
-                    <a:pt x="3294636" y="1590"/>
-                  </a:lnTo>
-                  <a:lnTo>
-                    <a:pt x="3223013" y="23590"/>
-                  </a:lnTo>
-                  <a:lnTo>
-                    <a:pt x="3151391" y="45033"/>
-                  </a:lnTo>
-                  <a:lnTo>
-                    <a:pt x="3079768" y="65932"/>
-                  </a:lnTo>
-                  <a:lnTo>
-                    <a:pt x="3008146" y="86301"/>
-                  </a:lnTo>
-                  <a:lnTo>
-                    <a:pt x="2936523" y="106154"/>
-                  </a:lnTo>
-                  <a:lnTo>
-                    <a:pt x="2864901" y="125504"/>
-                  </a:lnTo>
-                  <a:lnTo>
-                    <a:pt x="2793278" y="144364"/>
-                  </a:lnTo>
-                  <a:lnTo>
-                    <a:pt x="2721655" y="162745"/>
-                  </a:lnTo>
-                  <a:lnTo>
-                    <a:pt x="2650033" y="180660"/>
-                  </a:lnTo>
-                  <a:lnTo>
-                    <a:pt x="2578410" y="198121"/>
-                  </a:lnTo>
-                  <a:lnTo>
-                    <a:pt x="2506788" y="215140"/>
-                  </a:lnTo>
-                  <a:lnTo>
-                    <a:pt x="2435165" y="231727"/>
-                  </a:lnTo>
-                  <a:lnTo>
-                    <a:pt x="2363543" y="247894"/>
-                  </a:lnTo>
-                  <a:lnTo>
-                    <a:pt x="2291920" y="263651"/>
-                  </a:lnTo>
-                  <a:lnTo>
-                    <a:pt x="2220298" y="279008"/>
-                  </a:lnTo>
-                  <a:lnTo>
-                    <a:pt x="2148675" y="293977"/>
-                  </a:lnTo>
-                  <a:lnTo>
-                    <a:pt x="2077053" y="308566"/>
-                  </a:lnTo>
-                  <a:lnTo>
-                    <a:pt x="2005430" y="322785"/>
-                  </a:lnTo>
-                  <a:lnTo>
-                    <a:pt x="1933808" y="336643"/>
-                  </a:lnTo>
-                  <a:lnTo>
-                    <a:pt x="1862185" y="350151"/>
-                  </a:lnTo>
-                  <a:lnTo>
-                    <a:pt x="1790563" y="363316"/>
-                  </a:lnTo>
-                  <a:lnTo>
-                    <a:pt x="1718940" y="376147"/>
-                  </a:lnTo>
-                  <a:lnTo>
-                    <a:pt x="1647318" y="388653"/>
-                  </a:lnTo>
-                  <a:lnTo>
-                    <a:pt x="1575695" y="400842"/>
-                  </a:lnTo>
-                  <a:lnTo>
-                    <a:pt x="1504073" y="412722"/>
-                  </a:lnTo>
-                  <a:lnTo>
-                    <a:pt x="1432450" y="424301"/>
-                  </a:lnTo>
-                  <a:lnTo>
-                    <a:pt x="1360827" y="435586"/>
-                  </a:lnTo>
-                  <a:lnTo>
-                    <a:pt x="1289205" y="446586"/>
-                  </a:lnTo>
-                  <a:lnTo>
-                    <a:pt x="1217582" y="457306"/>
-                  </a:lnTo>
-                  <a:lnTo>
-                    <a:pt x="1145960" y="467755"/>
-                  </a:lnTo>
-                  <a:lnTo>
-                    <a:pt x="1074337" y="477939"/>
-                  </a:lnTo>
-                  <a:lnTo>
-                    <a:pt x="1002715" y="487865"/>
-                  </a:lnTo>
-                  <a:lnTo>
-                    <a:pt x="931092" y="497539"/>
-                  </a:lnTo>
-                  <a:lnTo>
-                    <a:pt x="859470" y="506968"/>
-                  </a:lnTo>
-                  <a:lnTo>
-                    <a:pt x="787847" y="516158"/>
-                  </a:lnTo>
-                  <a:lnTo>
-                    <a:pt x="716225" y="525115"/>
-                  </a:lnTo>
-                  <a:lnTo>
-                    <a:pt x="644602" y="533845"/>
-                  </a:lnTo>
-                  <a:lnTo>
-                    <a:pt x="572980" y="542354"/>
-                  </a:lnTo>
-                  <a:lnTo>
-                    <a:pt x="501357" y="550647"/>
-                  </a:lnTo>
-                  <a:lnTo>
-                    <a:pt x="429735" y="558730"/>
-                  </a:lnTo>
-                  <a:lnTo>
-                    <a:pt x="358112" y="566607"/>
-                  </a:lnTo>
-                  <a:lnTo>
-                    <a:pt x="286490" y="574286"/>
-                  </a:lnTo>
-                  <a:lnTo>
-                    <a:pt x="214867" y="581769"/>
-                  </a:lnTo>
-                  <a:lnTo>
-                    <a:pt x="143245" y="589063"/>
-                  </a:lnTo>
-                  <a:lnTo>
-                    <a:pt x="71622" y="596172"/>
-                  </a:lnTo>
-                  <a:lnTo>
-                    <a:pt x="0" y="603101"/>
+                    <a:pt x="7019007" y="362"/>
+                  </a:lnTo>
+                  <a:lnTo>
+                    <a:pt x="6947385" y="724"/>
+                  </a:lnTo>
+                  <a:lnTo>
+                    <a:pt x="6875762" y="1086"/>
+                  </a:lnTo>
+                  <a:lnTo>
+                    <a:pt x="6804139" y="1448"/>
+                  </a:lnTo>
+                  <a:lnTo>
+                    <a:pt x="6732517" y="1810"/>
+                  </a:lnTo>
+                  <a:lnTo>
+                    <a:pt x="6660894" y="2172"/>
+                  </a:lnTo>
+                  <a:lnTo>
+                    <a:pt x="6589272" y="2533"/>
+                  </a:lnTo>
+                  <a:lnTo>
+                    <a:pt x="6517649" y="2894"/>
+                  </a:lnTo>
+                  <a:lnTo>
+                    <a:pt x="6446027" y="3256"/>
+                  </a:lnTo>
+                  <a:lnTo>
+                    <a:pt x="6374404" y="3617"/>
+                  </a:lnTo>
+                  <a:lnTo>
+                    <a:pt x="6302782" y="3978"/>
+                  </a:lnTo>
+                  <a:lnTo>
+                    <a:pt x="6231159" y="4338"/>
+                  </a:lnTo>
+                  <a:lnTo>
+                    <a:pt x="6159537" y="4699"/>
+                  </a:lnTo>
+                  <a:lnTo>
+                    <a:pt x="6087914" y="5059"/>
+                  </a:lnTo>
+                  <a:lnTo>
+                    <a:pt x="6016292" y="5420"/>
+                  </a:lnTo>
+                  <a:lnTo>
+                    <a:pt x="5944669" y="5780"/>
+                  </a:lnTo>
+                  <a:lnTo>
+                    <a:pt x="5873047" y="6140"/>
+                  </a:lnTo>
+                  <a:lnTo>
+                    <a:pt x="5801424" y="6500"/>
+                  </a:lnTo>
+                  <a:lnTo>
+                    <a:pt x="5729802" y="6859"/>
+                  </a:lnTo>
+                  <a:lnTo>
+                    <a:pt x="5658179" y="7219"/>
+                  </a:lnTo>
+                  <a:lnTo>
+                    <a:pt x="5586557" y="7578"/>
+                  </a:lnTo>
+                  <a:lnTo>
+                    <a:pt x="5514934" y="7938"/>
+                  </a:lnTo>
+                  <a:lnTo>
+                    <a:pt x="5443311" y="8297"/>
+                  </a:lnTo>
+                  <a:lnTo>
+                    <a:pt x="5371689" y="8656"/>
+                  </a:lnTo>
+                  <a:lnTo>
+                    <a:pt x="5300066" y="9015"/>
+                  </a:lnTo>
+                  <a:lnTo>
+                    <a:pt x="5228444" y="9373"/>
+                  </a:lnTo>
+                  <a:lnTo>
+                    <a:pt x="5156821" y="9732"/>
+                  </a:lnTo>
+                  <a:lnTo>
+                    <a:pt x="5085199" y="10090"/>
+                  </a:lnTo>
+                  <a:lnTo>
+                    <a:pt x="5013576" y="10449"/>
+                  </a:lnTo>
+                  <a:lnTo>
+                    <a:pt x="4941954" y="10807"/>
+                  </a:lnTo>
+                  <a:lnTo>
+                    <a:pt x="4870331" y="11165"/>
+                  </a:lnTo>
+                  <a:lnTo>
+                    <a:pt x="4798709" y="11523"/>
+                  </a:lnTo>
+                  <a:lnTo>
+                    <a:pt x="4727086" y="11880"/>
+                  </a:lnTo>
+                  <a:lnTo>
+                    <a:pt x="4655464" y="12238"/>
+                  </a:lnTo>
+                  <a:lnTo>
+                    <a:pt x="4583841" y="12595"/>
+                  </a:lnTo>
+                  <a:lnTo>
+                    <a:pt x="4512219" y="12952"/>
+                  </a:lnTo>
+                  <a:lnTo>
+                    <a:pt x="4440596" y="13309"/>
+                  </a:lnTo>
+                  <a:lnTo>
+                    <a:pt x="4368974" y="13666"/>
+                  </a:lnTo>
+                  <a:lnTo>
+                    <a:pt x="4297351" y="14023"/>
+                  </a:lnTo>
+                  <a:lnTo>
+                    <a:pt x="4225729" y="14380"/>
+                  </a:lnTo>
+                  <a:lnTo>
+                    <a:pt x="4154106" y="14736"/>
+                  </a:lnTo>
+                  <a:lnTo>
+                    <a:pt x="4082483" y="15093"/>
+                  </a:lnTo>
+                  <a:lnTo>
+                    <a:pt x="4010861" y="15449"/>
+                  </a:lnTo>
+                  <a:lnTo>
+                    <a:pt x="3939238" y="15805"/>
+                  </a:lnTo>
+                  <a:lnTo>
+                    <a:pt x="3867616" y="16161"/>
+                  </a:lnTo>
+                  <a:lnTo>
+                    <a:pt x="3795993" y="16517"/>
+                  </a:lnTo>
+                  <a:lnTo>
+                    <a:pt x="3724371" y="16872"/>
+                  </a:lnTo>
+                  <a:lnTo>
+                    <a:pt x="3652748" y="17228"/>
+                  </a:lnTo>
+                  <a:lnTo>
+                    <a:pt x="3581126" y="17583"/>
+                  </a:lnTo>
+                  <a:lnTo>
+                    <a:pt x="3509503" y="17938"/>
+                  </a:lnTo>
+                  <a:lnTo>
+                    <a:pt x="3437881" y="18293"/>
+                  </a:lnTo>
+                  <a:lnTo>
+                    <a:pt x="3366258" y="18648"/>
+                  </a:lnTo>
+                  <a:lnTo>
+                    <a:pt x="3294636" y="19003"/>
+                  </a:lnTo>
+                  <a:lnTo>
+                    <a:pt x="3223013" y="40581"/>
+                  </a:lnTo>
+                  <a:lnTo>
+                    <a:pt x="3151391" y="62474"/>
+                  </a:lnTo>
+                  <a:lnTo>
+                    <a:pt x="3079768" y="83802"/>
+                  </a:lnTo>
+                  <a:lnTo>
+                    <a:pt x="3008146" y="104579"/>
+                  </a:lnTo>
+                  <a:lnTo>
+                    <a:pt x="2936523" y="124820"/>
+                  </a:lnTo>
+                  <a:lnTo>
+                    <a:pt x="2864901" y="144539"/>
+                  </a:lnTo>
+                  <a:lnTo>
+                    <a:pt x="2793278" y="163748"/>
+                  </a:lnTo>
+                  <a:lnTo>
+                    <a:pt x="2721655" y="182462"/>
+                  </a:lnTo>
+                  <a:lnTo>
+                    <a:pt x="2650033" y="200692"/>
+                  </a:lnTo>
+                  <a:lnTo>
+                    <a:pt x="2578410" y="218452"/>
+                  </a:lnTo>
+                  <a:lnTo>
+                    <a:pt x="2506788" y="235753"/>
+                  </a:lnTo>
+                  <a:lnTo>
+                    <a:pt x="2435165" y="252608"/>
+                  </a:lnTo>
+                  <a:lnTo>
+                    <a:pt x="2363543" y="269028"/>
+                  </a:lnTo>
+                  <a:lnTo>
+                    <a:pt x="2291920" y="285024"/>
+                  </a:lnTo>
+                  <a:lnTo>
+                    <a:pt x="2220298" y="300607"/>
+                  </a:lnTo>
+                  <a:lnTo>
+                    <a:pt x="2148675" y="315788"/>
+                  </a:lnTo>
+                  <a:lnTo>
+                    <a:pt x="2077053" y="330576"/>
+                  </a:lnTo>
+                  <a:lnTo>
+                    <a:pt x="2005430" y="344984"/>
+                  </a:lnTo>
+                  <a:lnTo>
+                    <a:pt x="1933808" y="359019"/>
+                  </a:lnTo>
+                  <a:lnTo>
+                    <a:pt x="1862185" y="372692"/>
+                  </a:lnTo>
+                  <a:lnTo>
+                    <a:pt x="1790563" y="386012"/>
+                  </a:lnTo>
+                  <a:lnTo>
+                    <a:pt x="1718940" y="398988"/>
+                  </a:lnTo>
+                  <a:lnTo>
+                    <a:pt x="1647318" y="411629"/>
+                  </a:lnTo>
+                  <a:lnTo>
+                    <a:pt x="1575695" y="423944"/>
+                  </a:lnTo>
+                  <a:lnTo>
+                    <a:pt x="1504073" y="435941"/>
+                  </a:lnTo>
+                  <a:lnTo>
+                    <a:pt x="1432450" y="447628"/>
+                  </a:lnTo>
+                  <a:lnTo>
+                    <a:pt x="1360827" y="459013"/>
+                  </a:lnTo>
+                  <a:lnTo>
+                    <a:pt x="1289205" y="470105"/>
+                  </a:lnTo>
+                  <a:lnTo>
+                    <a:pt x="1217582" y="480910"/>
+                  </a:lnTo>
+                  <a:lnTo>
+                    <a:pt x="1145960" y="491437"/>
+                  </a:lnTo>
+                  <a:lnTo>
+                    <a:pt x="1074337" y="501692"/>
+                  </a:lnTo>
+                  <a:lnTo>
+                    <a:pt x="1002715" y="511682"/>
+                  </a:lnTo>
+                  <a:lnTo>
+                    <a:pt x="931092" y="521414"/>
+                  </a:lnTo>
+                  <a:lnTo>
+                    <a:pt x="859470" y="530895"/>
+                  </a:lnTo>
+                  <a:lnTo>
+                    <a:pt x="787847" y="540131"/>
+                  </a:lnTo>
+                  <a:lnTo>
+                    <a:pt x="716225" y="549128"/>
+                  </a:lnTo>
+                  <a:lnTo>
+                    <a:pt x="644602" y="557894"/>
+                  </a:lnTo>
+                  <a:lnTo>
+                    <a:pt x="572980" y="566433"/>
+                  </a:lnTo>
+                  <a:lnTo>
+                    <a:pt x="501357" y="574752"/>
+                  </a:lnTo>
+                  <a:lnTo>
+                    <a:pt x="429735" y="582856"/>
+                  </a:lnTo>
+                  <a:lnTo>
+                    <a:pt x="358112" y="590751"/>
+                  </a:lnTo>
+                  <a:lnTo>
+                    <a:pt x="286490" y="598442"/>
+                  </a:lnTo>
+                  <a:lnTo>
+                    <a:pt x="214867" y="605934"/>
+                  </a:lnTo>
+                  <a:lnTo>
+                    <a:pt x="143245" y="613233"/>
+                  </a:lnTo>
+                  <a:lnTo>
+                    <a:pt x="71622" y="620344"/>
+                  </a:lnTo>
+                  <a:lnTo>
+                    <a:pt x="0" y="627271"/>
                   </a:lnTo>
                 </a:path>
               </a:pathLst>
@@ -4240,309 +4240,309 @@
           </p:nvSpPr>
           <p:spPr>
             <a:xfrm>
-              <a:off x="1172049" y="3842447"/>
-              <a:ext cx="7090630" cy="1223247"/>
+              <a:off x="1172049" y="3790194"/>
+              <a:ext cx="7090630" cy="1286643"/>
             </a:xfrm>
             <a:custGeom>
               <a:avLst/>
               <a:pathLst>
-                <a:path w="7090630" h="1223247">
+                <a:path w="7090630" h="1286643">
                   <a:moveTo>
-                    <a:pt x="0" y="1223247"/>
+                    <a:pt x="0" y="1286643"/>
                   </a:moveTo>
                   <a:lnTo>
-                    <a:pt x="71622" y="1217047"/>
-                  </a:lnTo>
-                  <a:lnTo>
-                    <a:pt x="143245" y="1210769"/>
-                  </a:lnTo>
-                  <a:lnTo>
-                    <a:pt x="214867" y="1204409"/>
-                  </a:lnTo>
-                  <a:lnTo>
-                    <a:pt x="286490" y="1197968"/>
-                  </a:lnTo>
-                  <a:lnTo>
-                    <a:pt x="358112" y="1191445"/>
-                  </a:lnTo>
-                  <a:lnTo>
-                    <a:pt x="429735" y="1184837"/>
-                  </a:lnTo>
-                  <a:lnTo>
-                    <a:pt x="501357" y="1178146"/>
-                  </a:lnTo>
-                  <a:lnTo>
-                    <a:pt x="572980" y="1171368"/>
-                  </a:lnTo>
-                  <a:lnTo>
-                    <a:pt x="644602" y="1164503"/>
-                  </a:lnTo>
-                  <a:lnTo>
-                    <a:pt x="716225" y="1157551"/>
-                  </a:lnTo>
-                  <a:lnTo>
-                    <a:pt x="787847" y="1150509"/>
-                  </a:lnTo>
-                  <a:lnTo>
-                    <a:pt x="859470" y="1143377"/>
-                  </a:lnTo>
-                  <a:lnTo>
-                    <a:pt x="931092" y="1136153"/>
-                  </a:lnTo>
-                  <a:lnTo>
-                    <a:pt x="1002715" y="1128837"/>
-                  </a:lnTo>
-                  <a:lnTo>
-                    <a:pt x="1074337" y="1121427"/>
-                  </a:lnTo>
-                  <a:lnTo>
-                    <a:pt x="1145960" y="1113922"/>
-                  </a:lnTo>
-                  <a:lnTo>
-                    <a:pt x="1217582" y="1106321"/>
-                  </a:lnTo>
-                  <a:lnTo>
-                    <a:pt x="1289205" y="1098623"/>
-                  </a:lnTo>
-                  <a:lnTo>
-                    <a:pt x="1360827" y="1090825"/>
-                  </a:lnTo>
-                  <a:lnTo>
-                    <a:pt x="1432450" y="1082928"/>
-                  </a:lnTo>
-                  <a:lnTo>
-                    <a:pt x="1504073" y="1074929"/>
-                  </a:lnTo>
-                  <a:lnTo>
-                    <a:pt x="1575695" y="1066828"/>
-                  </a:lnTo>
-                  <a:lnTo>
-                    <a:pt x="1647318" y="1058623"/>
-                  </a:lnTo>
-                  <a:lnTo>
-                    <a:pt x="1718940" y="1050313"/>
-                  </a:lnTo>
-                  <a:lnTo>
-                    <a:pt x="1790563" y="1041896"/>
-                  </a:lnTo>
-                  <a:lnTo>
-                    <a:pt x="1862185" y="1033372"/>
-                  </a:lnTo>
-                  <a:lnTo>
-                    <a:pt x="1933808" y="1024738"/>
-                  </a:lnTo>
-                  <a:lnTo>
-                    <a:pt x="2005430" y="1015993"/>
-                  </a:lnTo>
-                  <a:lnTo>
-                    <a:pt x="2077053" y="1007136"/>
-                  </a:lnTo>
-                  <a:lnTo>
-                    <a:pt x="2148675" y="998166"/>
-                  </a:lnTo>
-                  <a:lnTo>
-                    <a:pt x="2220298" y="989081"/>
-                  </a:lnTo>
-                  <a:lnTo>
-                    <a:pt x="2291920" y="979879"/>
-                  </a:lnTo>
-                  <a:lnTo>
-                    <a:pt x="2363543" y="970559"/>
-                  </a:lnTo>
-                  <a:lnTo>
-                    <a:pt x="2435165" y="961120"/>
-                  </a:lnTo>
-                  <a:lnTo>
-                    <a:pt x="2506788" y="951559"/>
-                  </a:lnTo>
-                  <a:lnTo>
-                    <a:pt x="2578410" y="941877"/>
-                  </a:lnTo>
-                  <a:lnTo>
-                    <a:pt x="2650033" y="932070"/>
-                  </a:lnTo>
-                  <a:lnTo>
-                    <a:pt x="2721655" y="922137"/>
-                  </a:lnTo>
-                  <a:lnTo>
-                    <a:pt x="2793278" y="912077"/>
-                  </a:lnTo>
-                  <a:lnTo>
-                    <a:pt x="2864901" y="901887"/>
-                  </a:lnTo>
-                  <a:lnTo>
-                    <a:pt x="2936523" y="891568"/>
-                  </a:lnTo>
-                  <a:lnTo>
-                    <a:pt x="3008146" y="881116"/>
-                  </a:lnTo>
-                  <a:lnTo>
-                    <a:pt x="3079768" y="870529"/>
-                  </a:lnTo>
-                  <a:lnTo>
-                    <a:pt x="3151391" y="859808"/>
-                  </a:lnTo>
-                  <a:lnTo>
-                    <a:pt x="3223013" y="848948"/>
-                  </a:lnTo>
-                  <a:lnTo>
-                    <a:pt x="3294636" y="837950"/>
-                  </a:lnTo>
-                  <a:lnTo>
-                    <a:pt x="3366258" y="826810"/>
-                  </a:lnTo>
-                  <a:lnTo>
-                    <a:pt x="3437881" y="815528"/>
-                  </a:lnTo>
-                  <a:lnTo>
-                    <a:pt x="3509503" y="804101"/>
-                  </a:lnTo>
-                  <a:lnTo>
-                    <a:pt x="3581126" y="792527"/>
-                  </a:lnTo>
-                  <a:lnTo>
-                    <a:pt x="3652748" y="780805"/>
-                  </a:lnTo>
-                  <a:lnTo>
-                    <a:pt x="3724371" y="768933"/>
-                  </a:lnTo>
-                  <a:lnTo>
-                    <a:pt x="3795993" y="756908"/>
-                  </a:lnTo>
-                  <a:lnTo>
-                    <a:pt x="3867616" y="744730"/>
-                  </a:lnTo>
-                  <a:lnTo>
-                    <a:pt x="3939238" y="732395"/>
-                  </a:lnTo>
-                  <a:lnTo>
-                    <a:pt x="4010861" y="719902"/>
-                  </a:lnTo>
-                  <a:lnTo>
-                    <a:pt x="4082483" y="707249"/>
-                  </a:lnTo>
-                  <a:lnTo>
-                    <a:pt x="4154106" y="694433"/>
-                  </a:lnTo>
-                  <a:lnTo>
-                    <a:pt x="4225729" y="681454"/>
-                  </a:lnTo>
-                  <a:lnTo>
-                    <a:pt x="4297351" y="668308"/>
-                  </a:lnTo>
-                  <a:lnTo>
-                    <a:pt x="4368974" y="654993"/>
-                  </a:lnTo>
-                  <a:lnTo>
-                    <a:pt x="4440596" y="641508"/>
-                  </a:lnTo>
-                  <a:lnTo>
-                    <a:pt x="4512219" y="627849"/>
-                  </a:lnTo>
-                  <a:lnTo>
-                    <a:pt x="4583841" y="614016"/>
-                  </a:lnTo>
-                  <a:lnTo>
-                    <a:pt x="4655464" y="600005"/>
-                  </a:lnTo>
-                  <a:lnTo>
-                    <a:pt x="4727086" y="585815"/>
-                  </a:lnTo>
-                  <a:lnTo>
-                    <a:pt x="4798709" y="571442"/>
-                  </a:lnTo>
-                  <a:lnTo>
-                    <a:pt x="4870331" y="556886"/>
-                  </a:lnTo>
-                  <a:lnTo>
-                    <a:pt x="4941954" y="542142"/>
-                  </a:lnTo>
-                  <a:lnTo>
-                    <a:pt x="5013576" y="527210"/>
-                  </a:lnTo>
-                  <a:lnTo>
-                    <a:pt x="5085199" y="512086"/>
-                  </a:lnTo>
-                  <a:lnTo>
-                    <a:pt x="5156821" y="496769"/>
-                  </a:lnTo>
-                  <a:lnTo>
-                    <a:pt x="5228444" y="481255"/>
-                  </a:lnTo>
-                  <a:lnTo>
-                    <a:pt x="5300066" y="465542"/>
-                  </a:lnTo>
-                  <a:lnTo>
-                    <a:pt x="5371689" y="449627"/>
-                  </a:lnTo>
-                  <a:lnTo>
-                    <a:pt x="5443311" y="433509"/>
-                  </a:lnTo>
-                  <a:lnTo>
-                    <a:pt x="5514934" y="417183"/>
-                  </a:lnTo>
-                  <a:lnTo>
-                    <a:pt x="5586557" y="400649"/>
-                  </a:lnTo>
-                  <a:lnTo>
-                    <a:pt x="5658179" y="383902"/>
-                  </a:lnTo>
-                  <a:lnTo>
-                    <a:pt x="5729802" y="366941"/>
-                  </a:lnTo>
-                  <a:lnTo>
-                    <a:pt x="5801424" y="349762"/>
-                  </a:lnTo>
-                  <a:lnTo>
-                    <a:pt x="5873047" y="332364"/>
-                  </a:lnTo>
-                  <a:lnTo>
-                    <a:pt x="5944669" y="314742"/>
-                  </a:lnTo>
-                  <a:lnTo>
-                    <a:pt x="6016292" y="296894"/>
-                  </a:lnTo>
-                  <a:lnTo>
-                    <a:pt x="6087914" y="278817"/>
-                  </a:lnTo>
-                  <a:lnTo>
-                    <a:pt x="6159537" y="260508"/>
-                  </a:lnTo>
-                  <a:lnTo>
-                    <a:pt x="6231159" y="241965"/>
-                  </a:lnTo>
-                  <a:lnTo>
-                    <a:pt x="6302782" y="223184"/>
-                  </a:lnTo>
-                  <a:lnTo>
-                    <a:pt x="6374404" y="204162"/>
-                  </a:lnTo>
-                  <a:lnTo>
-                    <a:pt x="6446027" y="184896"/>
-                  </a:lnTo>
-                  <a:lnTo>
-                    <a:pt x="6517649" y="165383"/>
-                  </a:lnTo>
-                  <a:lnTo>
-                    <a:pt x="6589272" y="145620"/>
-                  </a:lnTo>
-                  <a:lnTo>
-                    <a:pt x="6660894" y="125604"/>
-                  </a:lnTo>
-                  <a:lnTo>
-                    <a:pt x="6732517" y="105331"/>
-                  </a:lnTo>
-                  <a:lnTo>
-                    <a:pt x="6804139" y="84798"/>
-                  </a:lnTo>
-                  <a:lnTo>
-                    <a:pt x="6875762" y="64002"/>
-                  </a:lnTo>
-                  <a:lnTo>
-                    <a:pt x="6947385" y="42939"/>
-                  </a:lnTo>
-                  <a:lnTo>
-                    <a:pt x="7019007" y="21606"/>
+                    <a:pt x="71622" y="1280328"/>
+                  </a:lnTo>
+                  <a:lnTo>
+                    <a:pt x="143245" y="1273929"/>
+                  </a:lnTo>
+                  <a:lnTo>
+                    <a:pt x="214867" y="1267444"/>
+                  </a:lnTo>
+                  <a:lnTo>
+                    <a:pt x="286490" y="1260872"/>
+                  </a:lnTo>
+                  <a:lnTo>
+                    <a:pt x="358112" y="1254213"/>
+                  </a:lnTo>
+                  <a:lnTo>
+                    <a:pt x="429735" y="1247464"/>
+                  </a:lnTo>
+                  <a:lnTo>
+                    <a:pt x="501357" y="1240625"/>
+                  </a:lnTo>
+                  <a:lnTo>
+                    <a:pt x="572980" y="1233695"/>
+                  </a:lnTo>
+                  <a:lnTo>
+                    <a:pt x="644602" y="1226672"/>
+                  </a:lnTo>
+                  <a:lnTo>
+                    <a:pt x="716225" y="1219555"/>
+                  </a:lnTo>
+                  <a:lnTo>
+                    <a:pt x="787847" y="1212343"/>
+                  </a:lnTo>
+                  <a:lnTo>
+                    <a:pt x="859470" y="1205035"/>
+                  </a:lnTo>
+                  <a:lnTo>
+                    <a:pt x="931092" y="1197629"/>
+                  </a:lnTo>
+                  <a:lnTo>
+                    <a:pt x="1002715" y="1190124"/>
+                  </a:lnTo>
+                  <a:lnTo>
+                    <a:pt x="1074337" y="1182519"/>
+                  </a:lnTo>
+                  <a:lnTo>
+                    <a:pt x="1145960" y="1174812"/>
+                  </a:lnTo>
+                  <a:lnTo>
+                    <a:pt x="1217582" y="1167001"/>
+                  </a:lnTo>
+                  <a:lnTo>
+                    <a:pt x="1289205" y="1159087"/>
+                  </a:lnTo>
+                  <a:lnTo>
+                    <a:pt x="1360827" y="1151067"/>
+                  </a:lnTo>
+                  <a:lnTo>
+                    <a:pt x="1432450" y="1142939"/>
+                  </a:lnTo>
+                  <a:lnTo>
+                    <a:pt x="1504073" y="1134703"/>
+                  </a:lnTo>
+                  <a:lnTo>
+                    <a:pt x="1575695" y="1126357"/>
+                  </a:lnTo>
+                  <a:lnTo>
+                    <a:pt x="1647318" y="1117899"/>
+                  </a:lnTo>
+                  <a:lnTo>
+                    <a:pt x="1718940" y="1109328"/>
+                  </a:lnTo>
+                  <a:lnTo>
+                    <a:pt x="1790563" y="1100642"/>
+                  </a:lnTo>
+                  <a:lnTo>
+                    <a:pt x="1862185" y="1091841"/>
+                  </a:lnTo>
+                  <a:lnTo>
+                    <a:pt x="1933808" y="1082921"/>
+                  </a:lnTo>
+                  <a:lnTo>
+                    <a:pt x="2005430" y="1073883"/>
+                  </a:lnTo>
+                  <a:lnTo>
+                    <a:pt x="2077053" y="1064723"/>
+                  </a:lnTo>
+                  <a:lnTo>
+                    <a:pt x="2148675" y="1055441"/>
+                  </a:lnTo>
+                  <a:lnTo>
+                    <a:pt x="2220298" y="1046036"/>
+                  </a:lnTo>
+                  <a:lnTo>
+                    <a:pt x="2291920" y="1036504"/>
+                  </a:lnTo>
+                  <a:lnTo>
+                    <a:pt x="2363543" y="1026845"/>
+                  </a:lnTo>
+                  <a:lnTo>
+                    <a:pt x="2435165" y="1017056"/>
+                  </a:lnTo>
+                  <a:lnTo>
+                    <a:pt x="2506788" y="1007137"/>
+                  </a:lnTo>
+                  <a:lnTo>
+                    <a:pt x="2578410" y="997086"/>
+                  </a:lnTo>
+                  <a:lnTo>
+                    <a:pt x="2650033" y="986900"/>
+                  </a:lnTo>
+                  <a:lnTo>
+                    <a:pt x="2721655" y="976577"/>
+                  </a:lnTo>
+                  <a:lnTo>
+                    <a:pt x="2793278" y="966117"/>
+                  </a:lnTo>
+                  <a:lnTo>
+                    <a:pt x="2864901" y="955517"/>
+                  </a:lnTo>
+                  <a:lnTo>
+                    <a:pt x="2936523" y="944775"/>
+                  </a:lnTo>
+                  <a:lnTo>
+                    <a:pt x="3008146" y="933890"/>
+                  </a:lnTo>
+                  <a:lnTo>
+                    <a:pt x="3079768" y="922859"/>
+                  </a:lnTo>
+                  <a:lnTo>
+                    <a:pt x="3151391" y="911680"/>
+                  </a:lnTo>
+                  <a:lnTo>
+                    <a:pt x="3223013" y="900353"/>
+                  </a:lnTo>
+                  <a:lnTo>
+                    <a:pt x="3294636" y="888873"/>
+                  </a:lnTo>
+                  <a:lnTo>
+                    <a:pt x="3366258" y="877240"/>
+                  </a:lnTo>
+                  <a:lnTo>
+                    <a:pt x="3437881" y="865452"/>
+                  </a:lnTo>
+                  <a:lnTo>
+                    <a:pt x="3509503" y="853506"/>
+                  </a:lnTo>
+                  <a:lnTo>
+                    <a:pt x="3581126" y="841401"/>
+                  </a:lnTo>
+                  <a:lnTo>
+                    <a:pt x="3652748" y="829133"/>
+                  </a:lnTo>
+                  <a:lnTo>
+                    <a:pt x="3724371" y="816702"/>
+                  </a:lnTo>
+                  <a:lnTo>
+                    <a:pt x="3795993" y="804104"/>
+                  </a:lnTo>
+                  <a:lnTo>
+                    <a:pt x="3867616" y="791338"/>
+                  </a:lnTo>
+                  <a:lnTo>
+                    <a:pt x="3939238" y="778402"/>
+                  </a:lnTo>
+                  <a:lnTo>
+                    <a:pt x="4010861" y="765292"/>
+                  </a:lnTo>
+                  <a:lnTo>
+                    <a:pt x="4082483" y="752007"/>
+                  </a:lnTo>
+                  <a:lnTo>
+                    <a:pt x="4154106" y="738544"/>
+                  </a:lnTo>
+                  <a:lnTo>
+                    <a:pt x="4225729" y="724902"/>
+                  </a:lnTo>
+                  <a:lnTo>
+                    <a:pt x="4297351" y="711077"/>
+                  </a:lnTo>
+                  <a:lnTo>
+                    <a:pt x="4368974" y="697067"/>
+                  </a:lnTo>
+                  <a:lnTo>
+                    <a:pt x="4440596" y="682870"/>
+                  </a:lnTo>
+                  <a:lnTo>
+                    <a:pt x="4512219" y="668484"/>
+                  </a:lnTo>
+                  <a:lnTo>
+                    <a:pt x="4583841" y="653905"/>
+                  </a:lnTo>
+                  <a:lnTo>
+                    <a:pt x="4655464" y="639131"/>
+                  </a:lnTo>
+                  <a:lnTo>
+                    <a:pt x="4727086" y="624159"/>
+                  </a:lnTo>
+                  <a:lnTo>
+                    <a:pt x="4798709" y="608987"/>
+                  </a:lnTo>
+                  <a:lnTo>
+                    <a:pt x="4870331" y="593613"/>
+                  </a:lnTo>
+                  <a:lnTo>
+                    <a:pt x="4941954" y="578033"/>
+                  </a:lnTo>
+                  <a:lnTo>
+                    <a:pt x="5013576" y="562244"/>
+                  </a:lnTo>
+                  <a:lnTo>
+                    <a:pt x="5085199" y="546245"/>
+                  </a:lnTo>
+                  <a:lnTo>
+                    <a:pt x="5156821" y="530032"/>
+                  </a:lnTo>
+                  <a:lnTo>
+                    <a:pt x="5228444" y="513602"/>
+                  </a:lnTo>
+                  <a:lnTo>
+                    <a:pt x="5300066" y="496952"/>
+                  </a:lnTo>
+                  <a:lnTo>
+                    <a:pt x="5371689" y="480080"/>
+                  </a:lnTo>
+                  <a:lnTo>
+                    <a:pt x="5443311" y="462982"/>
+                  </a:lnTo>
+                  <a:lnTo>
+                    <a:pt x="5514934" y="445655"/>
+                  </a:lnTo>
+                  <a:lnTo>
+                    <a:pt x="5586557" y="428097"/>
+                  </a:lnTo>
+                  <a:lnTo>
+                    <a:pt x="5658179" y="410304"/>
+                  </a:lnTo>
+                  <a:lnTo>
+                    <a:pt x="5729802" y="392274"/>
+                  </a:lnTo>
+                  <a:lnTo>
+                    <a:pt x="5801424" y="374002"/>
+                  </a:lnTo>
+                  <a:lnTo>
+                    <a:pt x="5873047" y="355486"/>
+                  </a:lnTo>
+                  <a:lnTo>
+                    <a:pt x="5944669" y="336722"/>
+                  </a:lnTo>
+                  <a:lnTo>
+                    <a:pt x="6016292" y="317708"/>
+                  </a:lnTo>
+                  <a:lnTo>
+                    <a:pt x="6087914" y="298439"/>
+                  </a:lnTo>
+                  <a:lnTo>
+                    <a:pt x="6159537" y="278913"/>
+                  </a:lnTo>
+                  <a:lnTo>
+                    <a:pt x="6231159" y="259126"/>
+                  </a:lnTo>
+                  <a:lnTo>
+                    <a:pt x="6302782" y="239074"/>
+                  </a:lnTo>
+                  <a:lnTo>
+                    <a:pt x="6374404" y="218754"/>
+                  </a:lnTo>
+                  <a:lnTo>
+                    <a:pt x="6446027" y="198163"/>
+                  </a:lnTo>
+                  <a:lnTo>
+                    <a:pt x="6517649" y="177296"/>
+                  </a:lnTo>
+                  <a:lnTo>
+                    <a:pt x="6589272" y="156150"/>
+                  </a:lnTo>
+                  <a:lnTo>
+                    <a:pt x="6660894" y="134722"/>
+                  </a:lnTo>
+                  <a:lnTo>
+                    <a:pt x="6732517" y="113007"/>
+                  </a:lnTo>
+                  <a:lnTo>
+                    <a:pt x="6804139" y="91002"/>
+                  </a:lnTo>
+                  <a:lnTo>
+                    <a:pt x="6875762" y="68702"/>
+                  </a:lnTo>
+                  <a:lnTo>
+                    <a:pt x="6947385" y="46105"/>
+                  </a:lnTo>
+                  <a:lnTo>
+                    <a:pt x="7019007" y="23205"/>
                   </a:lnTo>
                   <a:lnTo>
                     <a:pt x="7090630" y="0"/>
@@ -4617,7 +4617,7 @@
           </p:nvSpPr>
           <p:spPr>
             <a:xfrm>
-              <a:off x="4472293" y="1896563"/>
+              <a:off x="4463824" y="1896563"/>
               <a:ext cx="0" cy="3826579"/>
             </a:xfrm>
             <a:custGeom>
@@ -4890,7 +4890,7 @@
           </p:nvSpPr>
           <p:spPr>
             <a:xfrm>
-              <a:off x="2004858" y="5785772"/>
+              <a:off x="2005445" y="5785772"/>
               <a:ext cx="223753" cy="80101"/>
             </a:xfrm>
             <a:prstGeom prst="rect">
@@ -4936,7 +4936,7 @@
           </p:nvSpPr>
           <p:spPr>
             <a:xfrm>
-              <a:off x="4499764" y="5785772"/>
+              <a:off x="4497209" y="5785772"/>
               <a:ext cx="62179" cy="80101"/>
             </a:xfrm>
             <a:prstGeom prst="rect">
@@ -4982,7 +4982,7 @@
           </p:nvSpPr>
           <p:spPr>
             <a:xfrm>
-              <a:off x="6851704" y="5785772"/>
+              <a:off x="6846007" y="5785772"/>
               <a:ext cx="186537" cy="80101"/>
             </a:xfrm>
             <a:prstGeom prst="rect">
